--- a/public/manuales/Capacitacion_Guardia.pptx
+++ b/public/manuales/Capacitacion_Guardia.pptx
@@ -14,8 +14,6 @@
     <p:sldId id="262" r:id="rId13"/>
     <p:sldId id="263" r:id="rId14"/>
     <p:sldId id="264" r:id="rId15"/>
-    <p:sldId id="265" r:id="rId16"/>
-    <p:sldId id="266" r:id="rId17"/>
   </p:sldIdLst>
   <p:sldSz cx="12191695" cy="6858000" type="screen4x3"/>
   <p:notesSz cx="6858000" cy="9144000"/>
@@ -3364,669 +3362,7 @@
                 </a:solidFill>
                 <a:latin typeface="Calibri"/>
               </a:rPr>
-              <a:t>Condominio Laguna Norte  ·  Junio 2026</a:t>
-            </a:r>
-          </a:p>
-        </p:txBody>
-      </p:sp>
-    </p:spTree>
-  </p:cSld>
-  <p:clrMapOvr>
-    <a:masterClrMapping/>
-  </p:clrMapOvr>
-</p:sld>
-</file>
-
-<file path=ppt/slides/slide10.xml><?xml version="1.0" encoding="utf-8"?>
-<p:sld xmlns:a="http://schemas.openxmlformats.org/drawingml/2006/main" xmlns:p="http://schemas.openxmlformats.org/presentationml/2006/main" xmlns:r="http://schemas.openxmlformats.org/officeDocument/2006/relationships">
-  <p:cSld>
-    <p:bg>
-      <p:bgPr>
-        <a:solidFill>
-          <a:srgbClr val="FFFFFF"/>
-        </a:solidFill>
-        <a:effectLst/>
-      </p:bgPr>
-    </p:bg>
-    <p:spTree>
-      <p:nvGrpSpPr>
-        <p:cNvPr id="1" name=""/>
-        <p:cNvGrpSpPr/>
-        <p:nvPr/>
-      </p:nvGrpSpPr>
-      <p:grpSpPr/>
-      <p:sp>
-        <p:nvSpPr>
-          <p:cNvPr id="2" name="Rectangle 1"/>
-          <p:cNvSpPr/>
-          <p:nvPr/>
-        </p:nvSpPr>
-        <p:spPr>
-          <a:xfrm>
-            <a:off x="0" y="0"/>
-            <a:ext cx="12191695" cy="822960"/>
-          </a:xfrm>
-          <a:prstGeom prst="rect">
-            <a:avLst/>
-          </a:prstGeom>
-          <a:solidFill>
-            <a:srgbClr val="0A1172"/>
-          </a:solidFill>
-          <a:ln>
-            <a:noFill/>
-          </a:ln>
-          <a:effectLst/>
-        </p:spPr>
-        <p:style>
-          <a:lnRef idx="1">
-            <a:schemeClr val="accent1"/>
-          </a:lnRef>
-          <a:fillRef idx="3">
-            <a:schemeClr val="accent1"/>
-          </a:fillRef>
-          <a:effectRef idx="2">
-            <a:schemeClr val="accent1"/>
-          </a:effectRef>
-          <a:fontRef idx="minor">
-            <a:schemeClr val="lt1"/>
-          </a:fontRef>
-        </p:style>
-        <p:txBody>
-          <a:bodyPr rtlCol="0" anchor="ctr"/>
-          <a:lstStyle/>
-          <a:p>
-            <a:pPr algn="ctr"/>
-          </a:p>
-        </p:txBody>
-      </p:sp>
-      <p:sp>
-        <p:nvSpPr>
-          <p:cNvPr id="3" name="TextBox 2"/>
-          <p:cNvSpPr txBox="1"/>
-          <p:nvPr/>
-        </p:nvSpPr>
-        <p:spPr>
-          <a:xfrm>
-            <a:off x="365760" y="137160"/>
-            <a:ext cx="10058400" cy="548640"/>
-          </a:xfrm>
-          <a:prstGeom prst="rect">
-            <a:avLst/>
-          </a:prstGeom>
-          <a:noFill/>
-        </p:spPr>
-        <p:txBody>
-          <a:bodyPr wrap="square" anchor="ctr" lIns="45720" rIns="45720">
-            <a:spAutoFit/>
-          </a:bodyPr>
-          <a:lstStyle/>
-          <a:p>
-            <a:pPr algn="l"/>
-            <a:r>
-              <a:rPr sz="2200" b="1">
-                <a:solidFill>
-                  <a:srgbClr val="FFFFFF"/>
-                </a:solidFill>
-                <a:latin typeface="Calibri"/>
-              </a:rPr>
-              <a:t>Datos de Acceso</a:t>
-            </a:r>
-          </a:p>
-        </p:txBody>
-      </p:sp>
-      <p:sp>
-        <p:nvSpPr>
-          <p:cNvPr id="4" name="TextBox 3"/>
-          <p:cNvSpPr txBox="1"/>
-          <p:nvPr/>
-        </p:nvSpPr>
-        <p:spPr>
-          <a:xfrm>
-            <a:off x="11247120" y="137160"/>
-            <a:ext cx="731520" cy="548640"/>
-          </a:xfrm>
-          <a:prstGeom prst="rect">
-            <a:avLst/>
-          </a:prstGeom>
-          <a:noFill/>
-        </p:spPr>
-        <p:txBody>
-          <a:bodyPr wrap="square" anchor="ctr" lIns="45720" rIns="45720">
-            <a:spAutoFit/>
-          </a:bodyPr>
-          <a:lstStyle/>
-          <a:p>
-            <a:pPr algn="r"/>
-            <a:r>
-              <a:rPr sz="1400" b="0">
-                <a:solidFill>
-                  <a:srgbClr val="F59E0B"/>
-                </a:solidFill>
-                <a:latin typeface="Calibri"/>
-              </a:rPr>
-              <a:t>10</a:t>
-            </a:r>
-          </a:p>
-        </p:txBody>
-      </p:sp>
-      <p:sp>
-        <p:nvSpPr>
-          <p:cNvPr id="5" name="TextBox 4"/>
-          <p:cNvSpPr txBox="1"/>
-          <p:nvPr/>
-        </p:nvSpPr>
-        <p:spPr>
-          <a:xfrm>
-            <a:off x="457200" y="1005840"/>
-            <a:ext cx="11247120" cy="731520"/>
-          </a:xfrm>
-          <a:prstGeom prst="rect">
-            <a:avLst/>
-          </a:prstGeom>
-          <a:noFill/>
-        </p:spPr>
-        <p:txBody>
-          <a:bodyPr wrap="square" anchor="t" lIns="45720" rIns="45720">
-            <a:spAutoFit/>
-          </a:bodyPr>
-          <a:lstStyle/>
-          <a:p>
-            <a:pPr algn="l"/>
-            <a:r>
-              <a:rPr sz="1400" b="0">
-                <a:solidFill>
-                  <a:srgbClr val="666666"/>
-                </a:solidFill>
-                <a:latin typeface="Calibri"/>
-              </a:rPr>
-              <a:t>Credenciales de prueba para capacitación:</a:t>
-            </a:r>
-          </a:p>
-        </p:txBody>
-      </p:sp>
-      <p:sp>
-        <p:nvSpPr>
-          <p:cNvPr id="6" name="TextBox 5"/>
-          <p:cNvSpPr txBox="1"/>
-          <p:nvPr/>
-        </p:nvSpPr>
-        <p:spPr>
-          <a:xfrm>
-            <a:off x="640080" y="1828800"/>
-            <a:ext cx="10972800" cy="4572000"/>
-          </a:xfrm>
-          <a:prstGeom prst="rect">
-            <a:avLst/>
-          </a:prstGeom>
-          <a:noFill/>
-        </p:spPr>
-        <p:txBody>
-          <a:bodyPr wrap="square">
-            <a:spAutoFit/>
-          </a:bodyPr>
-          <a:lstStyle/>
-          <a:p>
-            <a:pPr algn="l">
-              <a:lnSpc>
-                <a:spcPct val="140000"/>
-              </a:lnSpc>
-              <a:spcAft>
-                <a:spcPts val="800"/>
-              </a:spcAft>
-            </a:pPr>
-            <a:r>
-              <a:rPr sz="1600" b="1">
-                <a:solidFill>
-                  <a:srgbClr val="F59E0B"/>
-                </a:solidFill>
-                <a:latin typeface="Calibri"/>
-              </a:rPr>
-              <a:t>● </a:t>
-            </a:r>
-            <a:r>
-              <a:rPr sz="1600">
-                <a:solidFill>
-                  <a:srgbClr val="0F2040"/>
-                </a:solidFill>
-                <a:latin typeface="Calibri"/>
-              </a:rPr>
-              <a:t>URL: https://condominios-cyj.vercel.app</a:t>
-            </a:r>
-          </a:p>
-          <a:p>
-            <a:pPr algn="l">
-              <a:lnSpc>
-                <a:spcPct val="140000"/>
-              </a:lnSpc>
-              <a:spcAft>
-                <a:spcPts val="800"/>
-              </a:spcAft>
-            </a:pPr>
-            <a:r>
-              <a:rPr sz="1600" b="1">
-                <a:solidFill>
-                  <a:srgbClr val="F59E0B"/>
-                </a:solidFill>
-                <a:latin typeface="Calibri"/>
-              </a:rPr>
-              <a:t>● </a:t>
-            </a:r>
-            <a:r>
-              <a:rPr sz="1600">
-                <a:solidFill>
-                  <a:srgbClr val="0F2040"/>
-                </a:solidFill>
-                <a:latin typeface="Calibri"/>
-              </a:rPr>
-              <a:t>Email: guardia.test@cyj.cl</a:t>
-            </a:r>
-          </a:p>
-          <a:p>
-            <a:pPr algn="l">
-              <a:lnSpc>
-                <a:spcPct val="140000"/>
-              </a:lnSpc>
-              <a:spcAft>
-                <a:spcPts val="800"/>
-              </a:spcAft>
-            </a:pPr>
-            <a:r>
-              <a:rPr sz="1600" b="1">
-                <a:solidFill>
-                  <a:srgbClr val="F59E0B"/>
-                </a:solidFill>
-                <a:latin typeface="Calibri"/>
-              </a:rPr>
-              <a:t>● </a:t>
-            </a:r>
-            <a:r>
-              <a:rPr sz="1600">
-                <a:solidFill>
-                  <a:srgbClr val="0F2040"/>
-                </a:solidFill>
-                <a:latin typeface="Calibri"/>
-              </a:rPr>
-              <a:t>Contraseña temporal: Guardia2026!</a:t>
-            </a:r>
-          </a:p>
-          <a:p>
-            <a:pPr algn="l">
-              <a:lnSpc>
-                <a:spcPct val="140000"/>
-              </a:lnSpc>
-              <a:spcAft>
-                <a:spcPts val="800"/>
-              </a:spcAft>
-            </a:pPr>
-            <a:r>
-              <a:rPr sz="1600" b="1">
-                <a:solidFill>
-                  <a:srgbClr val="F59E0B"/>
-                </a:solidFill>
-                <a:latin typeface="Calibri"/>
-              </a:rPr>
-              <a:t>● </a:t>
-            </a:r>
-            <a:r>
-              <a:rPr sz="1600">
-                <a:solidFill>
-                  <a:srgbClr val="0F2040"/>
-                </a:solidFill>
-                <a:latin typeface="Calibri"/>
-              </a:rPr>
-              <a:t>Deberás cambiar la contraseña en el primer login</a:t>
-            </a:r>
-          </a:p>
-          <a:p>
-            <a:pPr algn="l">
-              <a:lnSpc>
-                <a:spcPct val="140000"/>
-              </a:lnSpc>
-              <a:spcAft>
-                <a:spcPts val="800"/>
-              </a:spcAft>
-            </a:pPr>
-            <a:r>
-              <a:rPr sz="1600" b="1">
-                <a:solidFill>
-                  <a:srgbClr val="F59E0B"/>
-                </a:solidFill>
-                <a:latin typeface="Calibri"/>
-              </a:rPr>
-              <a:t>● </a:t>
-            </a:r>
-            <a:r>
-              <a:rPr sz="1600">
-                <a:solidFill>
-                  <a:srgbClr val="0F2040"/>
-                </a:solidFill>
-                <a:latin typeface="Calibri"/>
-              </a:rPr>
-              <a:t>Página de inicio: /rondas-guardia (automática)</a:t>
-            </a:r>
-          </a:p>
-        </p:txBody>
-      </p:sp>
-      <p:sp>
-        <p:nvSpPr>
-          <p:cNvPr id="7" name="Rectangle 6"/>
-          <p:cNvSpPr/>
-          <p:nvPr/>
-        </p:nvSpPr>
-        <p:spPr>
-          <a:xfrm>
-            <a:off x="0" y="6583680"/>
-            <a:ext cx="12191695" cy="274320"/>
-          </a:xfrm>
-          <a:prstGeom prst="rect">
-            <a:avLst/>
-          </a:prstGeom>
-          <a:solidFill>
-            <a:srgbClr val="0F2040"/>
-          </a:solidFill>
-          <a:ln>
-            <a:noFill/>
-          </a:ln>
-          <a:effectLst/>
-        </p:spPr>
-        <p:style>
-          <a:lnRef idx="1">
-            <a:schemeClr val="accent1"/>
-          </a:lnRef>
-          <a:fillRef idx="3">
-            <a:schemeClr val="accent1"/>
-          </a:fillRef>
-          <a:effectRef idx="2">
-            <a:schemeClr val="accent1"/>
-          </a:effectRef>
-          <a:fontRef idx="minor">
-            <a:schemeClr val="lt1"/>
-          </a:fontRef>
-        </p:style>
-        <p:txBody>
-          <a:bodyPr rtlCol="0" anchor="ctr"/>
-          <a:lstStyle/>
-          <a:p>
-            <a:pPr algn="ctr"/>
-          </a:p>
-        </p:txBody>
-      </p:sp>
-      <p:sp>
-        <p:nvSpPr>
-          <p:cNvPr id="8" name="TextBox 7"/>
-          <p:cNvSpPr txBox="1"/>
-          <p:nvPr/>
-        </p:nvSpPr>
-        <p:spPr>
-          <a:xfrm>
-            <a:off x="365760" y="6583680"/>
-            <a:ext cx="6400800" cy="274320"/>
-          </a:xfrm>
-          <a:prstGeom prst="rect">
-            <a:avLst/>
-          </a:prstGeom>
-          <a:noFill/>
-        </p:spPr>
-        <p:txBody>
-          <a:bodyPr wrap="square" anchor="ctr" lIns="45720" rIns="45720">
-            <a:spAutoFit/>
-          </a:bodyPr>
-          <a:lstStyle/>
-          <a:p>
-            <a:pPr algn="l"/>
-            <a:r>
-              <a:rPr sz="900" b="0">
-                <a:solidFill>
-                  <a:srgbClr val="FFFFFF"/>
-                </a:solidFill>
-                <a:latin typeface="Calibri"/>
-              </a:rPr>
-              <a:t>Asesorías Integrales CyJ · Capacitación Guardia</a:t>
-            </a:r>
-          </a:p>
-        </p:txBody>
-      </p:sp>
-      <p:sp>
-        <p:nvSpPr>
-          <p:cNvPr id="9" name="TextBox 8"/>
-          <p:cNvSpPr txBox="1"/>
-          <p:nvPr/>
-        </p:nvSpPr>
-        <p:spPr>
-          <a:xfrm>
-            <a:off x="7315200" y="6583680"/>
-            <a:ext cx="4572000" cy="274320"/>
-          </a:xfrm>
-          <a:prstGeom prst="rect">
-            <a:avLst/>
-          </a:prstGeom>
-          <a:noFill/>
-        </p:spPr>
-        <p:txBody>
-          <a:bodyPr wrap="square" anchor="ctr" lIns="45720" rIns="45720">
-            <a:spAutoFit/>
-          </a:bodyPr>
-          <a:lstStyle/>
-          <a:p>
-            <a:pPr algn="r"/>
-            <a:r>
-              <a:rPr sz="900" b="0">
-                <a:solidFill>
-                  <a:srgbClr val="F59E0B"/>
-                </a:solidFill>
-                <a:latin typeface="Calibri"/>
-              </a:rPr>
-              <a:t>https://condominios-cyj.vercel.app</a:t>
-            </a:r>
-          </a:p>
-        </p:txBody>
-      </p:sp>
-    </p:spTree>
-  </p:cSld>
-  <p:clrMapOvr>
-    <a:masterClrMapping/>
-  </p:clrMapOvr>
-</p:sld>
-</file>
-
-<file path=ppt/slides/slide11.xml><?xml version="1.0" encoding="utf-8"?>
-<p:sld xmlns:a="http://schemas.openxmlformats.org/drawingml/2006/main" xmlns:p="http://schemas.openxmlformats.org/presentationml/2006/main" xmlns:r="http://schemas.openxmlformats.org/officeDocument/2006/relationships">
-  <p:cSld>
-    <p:bg>
-      <p:bgPr>
-        <a:solidFill>
-          <a:srgbClr val="0A1172"/>
-        </a:solidFill>
-        <a:effectLst/>
-      </p:bgPr>
-    </p:bg>
-    <p:spTree>
-      <p:nvGrpSpPr>
-        <p:cNvPr id="1" name=""/>
-        <p:cNvGrpSpPr/>
-        <p:nvPr/>
-      </p:nvGrpSpPr>
-      <p:grpSpPr/>
-      <p:sp>
-        <p:nvSpPr>
-          <p:cNvPr id="2" name="Rectangle 1"/>
-          <p:cNvSpPr/>
-          <p:nvPr/>
-        </p:nvSpPr>
-        <p:spPr>
-          <a:xfrm>
-            <a:off x="0" y="0"/>
-            <a:ext cx="365760" cy="6858000"/>
-          </a:xfrm>
-          <a:prstGeom prst="rect">
-            <a:avLst/>
-          </a:prstGeom>
-          <a:solidFill>
-            <a:srgbClr val="F59E0B"/>
-          </a:solidFill>
-          <a:ln>
-            <a:noFill/>
-          </a:ln>
-          <a:effectLst/>
-        </p:spPr>
-        <p:style>
-          <a:lnRef idx="1">
-            <a:schemeClr val="accent1"/>
-          </a:lnRef>
-          <a:fillRef idx="3">
-            <a:schemeClr val="accent1"/>
-          </a:fillRef>
-          <a:effectRef idx="2">
-            <a:schemeClr val="accent1"/>
-          </a:effectRef>
-          <a:fontRef idx="minor">
-            <a:schemeClr val="lt1"/>
-          </a:fontRef>
-        </p:style>
-        <p:txBody>
-          <a:bodyPr rtlCol="0" anchor="ctr"/>
-          <a:lstStyle/>
-          <a:p>
-            <a:pPr algn="ctr"/>
-          </a:p>
-        </p:txBody>
-      </p:sp>
-      <p:sp>
-        <p:nvSpPr>
-          <p:cNvPr id="3" name="TextBox 2"/>
-          <p:cNvSpPr txBox="1"/>
-          <p:nvPr/>
-        </p:nvSpPr>
-        <p:spPr>
-          <a:xfrm>
-            <a:off x="731520" y="2286000"/>
-            <a:ext cx="10698480" cy="914400"/>
-          </a:xfrm>
-          <a:prstGeom prst="rect">
-            <a:avLst/>
-          </a:prstGeom>
-          <a:noFill/>
-        </p:spPr>
-        <p:txBody>
-          <a:bodyPr wrap="square" anchor="ctr" lIns="45720" rIns="45720">
-            <a:spAutoFit/>
-          </a:bodyPr>
-          <a:lstStyle/>
-          <a:p>
-            <a:pPr algn="ctr"/>
-            <a:r>
-              <a:rPr sz="7200" b="1">
-                <a:solidFill>
-                  <a:srgbClr val="FFFFFF"/>
-                </a:solidFill>
-                <a:latin typeface="Calibri"/>
-              </a:rPr>
-              <a:t>¡Listo!</a:t>
-            </a:r>
-          </a:p>
-        </p:txBody>
-      </p:sp>
-      <p:sp>
-        <p:nvSpPr>
-          <p:cNvPr id="4" name="TextBox 3"/>
-          <p:cNvSpPr txBox="1"/>
-          <p:nvPr/>
-        </p:nvSpPr>
-        <p:spPr>
-          <a:xfrm>
-            <a:off x="731520" y="3474720"/>
-            <a:ext cx="10698480" cy="640080"/>
-          </a:xfrm>
-          <a:prstGeom prst="rect">
-            <a:avLst/>
-          </a:prstGeom>
-          <a:noFill/>
-        </p:spPr>
-        <p:txBody>
-          <a:bodyPr wrap="square" anchor="t" lIns="45720" rIns="45720">
-            <a:spAutoFit/>
-          </a:bodyPr>
-          <a:lstStyle/>
-          <a:p>
-            <a:pPr algn="ctr"/>
-            <a:r>
-              <a:rPr sz="2200" b="0">
-                <a:solidFill>
-                  <a:srgbClr val="F1F5F9"/>
-                </a:solidFill>
-                <a:latin typeface="Calibri"/>
-              </a:rPr>
-              <a:t>Ya puedes comenzar a usar el sistema como Guardia</a:t>
-            </a:r>
-          </a:p>
-        </p:txBody>
-      </p:sp>
-      <p:sp>
-        <p:nvSpPr>
-          <p:cNvPr id="5" name="TextBox 4"/>
-          <p:cNvSpPr txBox="1"/>
-          <p:nvPr/>
-        </p:nvSpPr>
-        <p:spPr>
-          <a:xfrm>
-            <a:off x="731520" y="4754880"/>
-            <a:ext cx="10698480" cy="457200"/>
-          </a:xfrm>
-          <a:prstGeom prst="rect">
-            <a:avLst/>
-          </a:prstGeom>
-          <a:noFill/>
-        </p:spPr>
-        <p:txBody>
-          <a:bodyPr wrap="square" anchor="t" lIns="45720" rIns="45720">
-            <a:spAutoFit/>
-          </a:bodyPr>
-          <a:lstStyle/>
-          <a:p>
-            <a:pPr algn="ctr"/>
-            <a:r>
-              <a:rPr sz="1400" b="0">
-                <a:solidFill>
-                  <a:srgbClr val="F59E0B"/>
-                </a:solidFill>
-                <a:latin typeface="Calibri"/>
-              </a:rPr>
-              <a:t>Si tienes dudas, consulta el Manual de Usuario o contacta al administrador</a:t>
-            </a:r>
-          </a:p>
-        </p:txBody>
-      </p:sp>
-      <p:sp>
-        <p:nvSpPr>
-          <p:cNvPr id="6" name="TextBox 5"/>
-          <p:cNvSpPr txBox="1"/>
-          <p:nvPr/>
-        </p:nvSpPr>
-        <p:spPr>
-          <a:xfrm>
-            <a:off x="731520" y="5852160"/>
-            <a:ext cx="10698480" cy="457200"/>
-          </a:xfrm>
-          <a:prstGeom prst="rect">
-            <a:avLst/>
-          </a:prstGeom>
-          <a:noFill/>
-        </p:spPr>
-        <p:txBody>
-          <a:bodyPr wrap="square" anchor="t" lIns="45720" rIns="45720">
-            <a:spAutoFit/>
-          </a:bodyPr>
-          <a:lstStyle/>
-          <a:p>
-            <a:pPr algn="ctr"/>
-            <a:r>
-              <a:rPr sz="1400" b="1">
-                <a:solidFill>
-                  <a:srgbClr val="FFFFFF"/>
-                </a:solidFill>
-                <a:latin typeface="Calibri"/>
-              </a:rPr>
-              <a:t>asesoriasintegralescyj@gmail.com  ·  +56 964 650 643</a:t>
+              <a:t>Condominio Laguna Norte  ·  Junio 2026  ·  v1.1</a:t>
             </a:r>
           </a:p>
         </p:txBody>
@@ -4201,7 +3537,7 @@
                 </a:solidFill>
                 <a:latin typeface="Calibri"/>
               </a:rPr>
-              <a:t>Como Guardia tienes una función específica: registrar las rondas escaneando los QR de los postos.</a:t>
+              <a:t>Como Guardia tienes una función específica: registrar las rondas escaneando QR.</a:t>
             </a:r>
           </a:p>
         </p:txBody>
@@ -4241,7 +3577,6 @@
                 <a:solidFill>
                   <a:srgbClr val="F59E0B"/>
                 </a:solidFill>
-                <a:latin typeface="Calibri"/>
               </a:rPr>
               <a:t>● </a:t>
             </a:r>
@@ -4250,7 +3585,6 @@
                 <a:solidFill>
                   <a:srgbClr val="0F2040"/>
                 </a:solidFill>
-                <a:latin typeface="Calibri"/>
               </a:rPr>
               <a:t>Registrar rondas escaneando QR con la cámara del celular</a:t>
             </a:r>
@@ -4269,7 +3603,6 @@
                 <a:solidFill>
                   <a:srgbClr val="F59E0B"/>
                 </a:solidFill>
-                <a:latin typeface="Calibri"/>
               </a:rPr>
               <a:t>● </a:t>
             </a:r>
@@ -4278,7 +3611,6 @@
                 <a:solidFill>
                   <a:srgbClr val="0F2040"/>
                 </a:solidFill>
-                <a:latin typeface="Calibri"/>
               </a:rPr>
               <a:t>Pasar por todos los postos de tu etapa en cada ronda</a:t>
             </a:r>
@@ -4297,7 +3629,6 @@
                 <a:solidFill>
                   <a:srgbClr val="F59E0B"/>
                 </a:solidFill>
-                <a:latin typeface="Calibri"/>
               </a:rPr>
               <a:t>● </a:t>
             </a:r>
@@ -4306,7 +3637,6 @@
                 <a:solidFill>
                   <a:srgbClr val="0F2040"/>
                 </a:solidFill>
-                <a:latin typeface="Calibri"/>
               </a:rPr>
               <a:t>Mantener el dispositivo cargado y con cámara funcional</a:t>
             </a:r>
@@ -4325,7 +3655,6 @@
                 <a:solidFill>
                   <a:srgbClr val="F59E0B"/>
                 </a:solidFill>
-                <a:latin typeface="Calibri"/>
               </a:rPr>
               <a:t>● </a:t>
             </a:r>
@@ -4334,7 +3663,6 @@
                 <a:solidFill>
                   <a:srgbClr val="0F2040"/>
                 </a:solidFill>
-                <a:latin typeface="Calibri"/>
               </a:rPr>
               <a:t>Reportar problemas con QR dañados o ilegibles</a:t>
             </a:r>
@@ -4353,7 +3681,6 @@
                 <a:solidFill>
                   <a:srgbClr val="F59E0B"/>
                 </a:solidFill>
-                <a:latin typeface="Calibri"/>
               </a:rPr>
               <a:t>● </a:t>
             </a:r>
@@ -4362,7 +3689,6 @@
                 <a:solidFill>
                   <a:srgbClr val="0F2040"/>
                 </a:solidFill>
-                <a:latin typeface="Calibri"/>
               </a:rPr>
               <a:t>Cerrar sesión al terminar tu turno</a:t>
             </a:r>
@@ -4583,7 +3909,7 @@
                 </a:solidFill>
                 <a:latin typeface="Calibri"/>
               </a:rPr>
-              <a:t>Página dedicada: /rondas-guardia</a:t>
+              <a:t>Página dedicada del Guardia</a:t>
             </a:r>
           </a:p>
         </p:txBody>
@@ -4623,22 +3949,81 @@
           </a:p>
         </p:txBody>
       </p:sp>
-      <p:sp>
-        <p:nvSpPr>
-          <p:cNvPr id="5" name="Rounded Rectangle 4"/>
+      <p:pic>
+        <p:nvPicPr>
+          <p:cNvPr id="5" name="Picture 4" descr="14_guardia_rondas.png"/>
+          <p:cNvPicPr>
+            <a:picLocks noChangeAspect="1"/>
+          </p:cNvPicPr>
+          <p:nvPr/>
+        </p:nvPicPr>
+        <p:blipFill>
+          <a:blip r:embed="rId2"/>
+          <a:stretch>
+            <a:fillRect/>
+          </a:stretch>
+        </p:blipFill>
+        <p:spPr>
+          <a:xfrm>
+            <a:off x="1386687" y="1097280"/>
+            <a:ext cx="9418320" cy="5886450"/>
+          </a:xfrm>
+          <a:prstGeom prst="rect">
+            <a:avLst/>
+          </a:prstGeom>
+        </p:spPr>
+      </p:pic>
+      <p:sp>
+        <p:nvSpPr>
+          <p:cNvPr id="6" name="TextBox 5"/>
+          <p:cNvSpPr txBox="1"/>
+          <p:nvPr/>
+        </p:nvSpPr>
+        <p:spPr>
+          <a:xfrm>
+            <a:off x="914400" y="6035040"/>
+            <a:ext cx="10332720" cy="457200"/>
+          </a:xfrm>
+          <a:prstGeom prst="rect">
+            <a:avLst/>
+          </a:prstGeom>
+          <a:noFill/>
+        </p:spPr>
+        <p:txBody>
+          <a:bodyPr wrap="square" anchor="ctr" lIns="45720" rIns="45720">
+            <a:spAutoFit/>
+          </a:bodyPr>
+          <a:lstStyle/>
+          <a:p>
+            <a:pPr algn="ctr"/>
+            <a:r>
+              <a:rPr sz="1200" b="0">
+                <a:solidFill>
+                  <a:srgbClr val="666666"/>
+                </a:solidFill>
+                <a:latin typeface="Calibri"/>
+              </a:rPr>
+              <a:t>Página /rondas-guardia — SOLO el botón "Registrar Ronda"</a:t>
+            </a:r>
+          </a:p>
+        </p:txBody>
+      </p:sp>
+      <p:sp>
+        <p:nvSpPr>
+          <p:cNvPr id="7" name="Rectangle 6"/>
           <p:cNvSpPr/>
           <p:nvPr/>
         </p:nvSpPr>
         <p:spPr>
           <a:xfrm>
-            <a:off x="914400" y="1828800"/>
-            <a:ext cx="10332720" cy="3200400"/>
-          </a:xfrm>
-          <a:prstGeom prst="roundRect">
+            <a:off x="0" y="6583680"/>
+            <a:ext cx="12191695" cy="274320"/>
+          </a:xfrm>
+          <a:prstGeom prst="rect">
             <a:avLst/>
           </a:prstGeom>
           <a:solidFill>
-            <a:srgbClr val="F1F5F9"/>
+            <a:srgbClr val="0F2040"/>
           </a:solidFill>
           <a:ln>
             <a:noFill/>
@@ -4669,20 +4054,116 @@
       </p:sp>
       <p:sp>
         <p:nvSpPr>
-          <p:cNvPr id="6" name="Rectangle 5"/>
+          <p:cNvPr id="8" name="TextBox 7"/>
+          <p:cNvSpPr txBox="1"/>
+          <p:nvPr/>
+        </p:nvSpPr>
+        <p:spPr>
+          <a:xfrm>
+            <a:off x="365760" y="6583680"/>
+            <a:ext cx="6400800" cy="274320"/>
+          </a:xfrm>
+          <a:prstGeom prst="rect">
+            <a:avLst/>
+          </a:prstGeom>
+          <a:noFill/>
+        </p:spPr>
+        <p:txBody>
+          <a:bodyPr wrap="square" anchor="ctr" lIns="45720" rIns="45720">
+            <a:spAutoFit/>
+          </a:bodyPr>
+          <a:lstStyle/>
+          <a:p>
+            <a:pPr algn="l"/>
+            <a:r>
+              <a:rPr sz="900" b="0">
+                <a:solidFill>
+                  <a:srgbClr val="FFFFFF"/>
+                </a:solidFill>
+                <a:latin typeface="Calibri"/>
+              </a:rPr>
+              <a:t>Asesorías Integrales CyJ · Capacitación Guardia</a:t>
+            </a:r>
+          </a:p>
+        </p:txBody>
+      </p:sp>
+      <p:sp>
+        <p:nvSpPr>
+          <p:cNvPr id="9" name="TextBox 8"/>
+          <p:cNvSpPr txBox="1"/>
+          <p:nvPr/>
+        </p:nvSpPr>
+        <p:spPr>
+          <a:xfrm>
+            <a:off x="7315200" y="6583680"/>
+            <a:ext cx="4572000" cy="274320"/>
+          </a:xfrm>
+          <a:prstGeom prst="rect">
+            <a:avLst/>
+          </a:prstGeom>
+          <a:noFill/>
+        </p:spPr>
+        <p:txBody>
+          <a:bodyPr wrap="square" anchor="ctr" lIns="45720" rIns="45720">
+            <a:spAutoFit/>
+          </a:bodyPr>
+          <a:lstStyle/>
+          <a:p>
+            <a:pPr algn="r"/>
+            <a:r>
+              <a:rPr sz="900" b="0">
+                <a:solidFill>
+                  <a:srgbClr val="F59E0B"/>
+                </a:solidFill>
+                <a:latin typeface="Calibri"/>
+              </a:rPr>
+              <a:t>https://condominios-cyj.vercel.app</a:t>
+            </a:r>
+          </a:p>
+        </p:txBody>
+      </p:sp>
+    </p:spTree>
+  </p:cSld>
+  <p:clrMapOvr>
+    <a:masterClrMapping/>
+  </p:clrMapOvr>
+</p:sld>
+</file>
+
+<file path=ppt/slides/slide4.xml><?xml version="1.0" encoding="utf-8"?>
+<p:sld xmlns:a="http://schemas.openxmlformats.org/drawingml/2006/main" xmlns:p="http://schemas.openxmlformats.org/presentationml/2006/main" xmlns:r="http://schemas.openxmlformats.org/officeDocument/2006/relationships">
+  <p:cSld>
+    <p:bg>
+      <p:bgPr>
+        <a:solidFill>
+          <a:srgbClr val="FFFFFF"/>
+        </a:solidFill>
+        <a:effectLst/>
+      </p:bgPr>
+    </p:bg>
+    <p:spTree>
+      <p:nvGrpSpPr>
+        <p:cNvPr id="1" name=""/>
+        <p:cNvGrpSpPr/>
+        <p:nvPr/>
+      </p:nvGrpSpPr>
+      <p:grpSpPr/>
+      <p:sp>
+        <p:nvSpPr>
+          <p:cNvPr id="2" name="Rectangle 1"/>
           <p:cNvSpPr/>
           <p:nvPr/>
         </p:nvSpPr>
         <p:spPr>
           <a:xfrm>
-            <a:off x="914400" y="1828800"/>
-            <a:ext cx="137160" cy="3200400"/>
+            <a:off x="0" y="0"/>
+            <a:ext cx="12191695" cy="822960"/>
           </a:xfrm>
           <a:prstGeom prst="rect">
             <a:avLst/>
           </a:prstGeom>
           <a:solidFill>
-            <a:srgbClr val="0369A1"/>
+            <a:srgbClr val="0A1172"/>
           </a:solidFill>
           <a:ln>
             <a:noFill/>
@@ -4713,14 +4194,14 @@
       </p:sp>
       <p:sp>
         <p:nvSpPr>
-          <p:cNvPr id="7" name="TextBox 6"/>
+          <p:cNvPr id="3" name="TextBox 2"/>
           <p:cNvSpPr txBox="1"/>
           <p:nvPr/>
         </p:nvSpPr>
         <p:spPr>
           <a:xfrm>
-            <a:off x="1371600" y="2103120"/>
-            <a:ext cx="1828800" cy="1828800"/>
+            <a:off x="365760" y="137160"/>
+            <a:ext cx="10058400" cy="548640"/>
           </a:xfrm>
           <a:prstGeom prst="rect">
             <a:avLst/>
@@ -4733,29 +4214,29 @@
           </a:bodyPr>
           <a:lstStyle/>
           <a:p>
-            <a:pPr algn="ctr"/>
-            <a:r>
-              <a:rPr sz="8000" b="0">
-                <a:solidFill>
-                  <a:srgbClr val="0369A1"/>
+            <a:pPr algn="l"/>
+            <a:r>
+              <a:rPr sz="2200" b="1">
+                <a:solidFill>
+                  <a:srgbClr val="FFFFFF"/>
                 </a:solidFill>
                 <a:latin typeface="Calibri"/>
               </a:rPr>
-              <a:t>ℹ️</a:t>
-            </a:r>
-          </a:p>
-        </p:txBody>
-      </p:sp>
-      <p:sp>
-        <p:nvSpPr>
-          <p:cNvPr id="8" name="TextBox 7"/>
+              <a:t>Flujo: Registrar Ronda</a:t>
+            </a:r>
+          </a:p>
+        </p:txBody>
+      </p:sp>
+      <p:sp>
+        <p:nvSpPr>
+          <p:cNvPr id="4" name="TextBox 3"/>
           <p:cNvSpPr txBox="1"/>
           <p:nvPr/>
         </p:nvSpPr>
         <p:spPr>
           <a:xfrm>
-            <a:off x="3474720" y="2103120"/>
-            <a:ext cx="7498079" cy="2743200"/>
+            <a:off x="11247120" y="137160"/>
+            <a:ext cx="731520" cy="548640"/>
           </a:xfrm>
           <a:prstGeom prst="rect">
             <a:avLst/>
@@ -4768,22 +4249,288 @@
           </a:bodyPr>
           <a:lstStyle/>
           <a:p>
+            <a:pPr algn="r"/>
+            <a:r>
+              <a:rPr sz="1400" b="0">
+                <a:solidFill>
+                  <a:srgbClr val="F59E0B"/>
+                </a:solidFill>
+                <a:latin typeface="Calibri"/>
+              </a:rPr>
+              <a:t>4</a:t>
+            </a:r>
+          </a:p>
+        </p:txBody>
+      </p:sp>
+      <p:sp>
+        <p:nvSpPr>
+          <p:cNvPr id="5" name="TextBox 4"/>
+          <p:cNvSpPr txBox="1"/>
+          <p:nvPr/>
+        </p:nvSpPr>
+        <p:spPr>
+          <a:xfrm>
+            <a:off x="457200" y="1005840"/>
+            <a:ext cx="11247120" cy="548640"/>
+          </a:xfrm>
+          <a:prstGeom prst="rect">
+            <a:avLst/>
+          </a:prstGeom>
+          <a:noFill/>
+        </p:spPr>
+        <p:txBody>
+          <a:bodyPr wrap="square" anchor="t" lIns="45720" rIns="45720">
+            <a:spAutoFit/>
+          </a:bodyPr>
+          <a:lstStyle/>
+          <a:p>
             <a:pPr algn="l"/>
             <a:r>
-              <a:rPr sz="1800" b="0">
+              <a:rPr sz="1400" b="0">
+                <a:solidFill>
+                  <a:srgbClr val="666666"/>
+                </a:solidFill>
+                <a:latin typeface="Calibri"/>
+              </a:rPr>
+              <a:t>Pasos para registrar una ronda:</a:t>
+            </a:r>
+          </a:p>
+        </p:txBody>
+      </p:sp>
+      <p:sp>
+        <p:nvSpPr>
+          <p:cNvPr id="6" name="TextBox 5"/>
+          <p:cNvSpPr txBox="1"/>
+          <p:nvPr/>
+        </p:nvSpPr>
+        <p:spPr>
+          <a:xfrm>
+            <a:off x="640080" y="1645920"/>
+            <a:ext cx="10972800" cy="4572000"/>
+          </a:xfrm>
+          <a:prstGeom prst="rect">
+            <a:avLst/>
+          </a:prstGeom>
+          <a:noFill/>
+        </p:spPr>
+        <p:txBody>
+          <a:bodyPr wrap="square">
+            <a:spAutoFit/>
+          </a:bodyPr>
+          <a:lstStyle/>
+          <a:p>
+            <a:pPr algn="l">
+              <a:lnSpc>
+                <a:spcPct val="150000"/>
+              </a:lnSpc>
+              <a:spcAft>
+                <a:spcPts val="1000"/>
+              </a:spcAft>
+            </a:pPr>
+            <a:r>
+              <a:rPr sz="2000" b="1">
+                <a:solidFill>
+                  <a:srgbClr val="F59E0B"/>
+                </a:solidFill>
+              </a:rPr>
+              <a:t>1.  </a:t>
+            </a:r>
+            <a:r>
+              <a:rPr sz="1600">
                 <a:solidFill>
                   <a:srgbClr val="0F2040"/>
                 </a:solidFill>
-                <a:latin typeface="Calibri"/>
-              </a:rPr>
-              <a:t>El rol Guardia tiene una PÁGINA DEDICADA que reemplaza completamente el sistema. NO ves sidebar, NO ves dashboard, NO ves OT ni otros módulos. SOLO ves el botón grande "REGISTRAR RONDA" que abre la cámara automáticamente. Es la interfaz más simple del sistema, diseñada para uso rápido en terreno.</a:t>
-            </a:r>
-          </a:p>
-        </p:txBody>
-      </p:sp>
-      <p:sp>
-        <p:nvSpPr>
-          <p:cNvPr id="9" name="Rectangle 8"/>
+              </a:rPr>
+              <a:t>Inicia sesión con tu email y contraseña</a:t>
+            </a:r>
+          </a:p>
+          <a:p>
+            <a:pPr algn="l">
+              <a:lnSpc>
+                <a:spcPct val="150000"/>
+              </a:lnSpc>
+              <a:spcAft>
+                <a:spcPts val="1000"/>
+              </a:spcAft>
+            </a:pPr>
+            <a:r>
+              <a:rPr sz="2000" b="1">
+                <a:solidFill>
+                  <a:srgbClr val="F59E0B"/>
+                </a:solidFill>
+              </a:rPr>
+              <a:t>2.  </a:t>
+            </a:r>
+            <a:r>
+              <a:rPr sz="1600">
+                <a:solidFill>
+                  <a:srgbClr val="0F2040"/>
+                </a:solidFill>
+              </a:rPr>
+              <a:t>Si es primer login, cambia tu contraseña temporal</a:t>
+            </a:r>
+          </a:p>
+          <a:p>
+            <a:pPr algn="l">
+              <a:lnSpc>
+                <a:spcPct val="150000"/>
+              </a:lnSpc>
+              <a:spcAft>
+                <a:spcPts val="1000"/>
+              </a:spcAft>
+            </a:pPr>
+            <a:r>
+              <a:rPr sz="2000" b="1">
+                <a:solidFill>
+                  <a:srgbClr val="F59E0B"/>
+                </a:solidFill>
+              </a:rPr>
+              <a:t>3.  </a:t>
+            </a:r>
+            <a:r>
+              <a:rPr sz="1600">
+                <a:solidFill>
+                  <a:srgbClr val="0F2040"/>
+                </a:solidFill>
+              </a:rPr>
+              <a:t>Serás redirigido automáticamente a /rondas-guardia</a:t>
+            </a:r>
+          </a:p>
+          <a:p>
+            <a:pPr algn="l">
+              <a:lnSpc>
+                <a:spcPct val="150000"/>
+              </a:lnSpc>
+              <a:spcAft>
+                <a:spcPts val="1000"/>
+              </a:spcAft>
+            </a:pPr>
+            <a:r>
+              <a:rPr sz="2000" b="1">
+                <a:solidFill>
+                  <a:srgbClr val="F59E0B"/>
+                </a:solidFill>
+              </a:rPr>
+              <a:t>4.  </a:t>
+            </a:r>
+            <a:r>
+              <a:rPr sz="1600">
+                <a:solidFill>
+                  <a:srgbClr val="0F2040"/>
+                </a:solidFill>
+              </a:rPr>
+              <a:t>Verás UN SOLO botón grande circular "REGISTRAR RONDA"</a:t>
+            </a:r>
+          </a:p>
+          <a:p>
+            <a:pPr algn="l">
+              <a:lnSpc>
+                <a:spcPct val="150000"/>
+              </a:lnSpc>
+              <a:spcAft>
+                <a:spcPts val="1000"/>
+              </a:spcAft>
+            </a:pPr>
+            <a:r>
+              <a:rPr sz="2000" b="1">
+                <a:solidFill>
+                  <a:srgbClr val="F59E0B"/>
+                </a:solidFill>
+              </a:rPr>
+              <a:t>5.  </a:t>
+            </a:r>
+            <a:r>
+              <a:rPr sz="1600">
+                <a:solidFill>
+                  <a:srgbClr val="0F2040"/>
+                </a:solidFill>
+              </a:rPr>
+              <a:t>Presiona el botón → el navegador pedirá permiso de cámara</a:t>
+            </a:r>
+          </a:p>
+          <a:p>
+            <a:pPr algn="l">
+              <a:lnSpc>
+                <a:spcPct val="150000"/>
+              </a:lnSpc>
+              <a:spcAft>
+                <a:spcPts val="1000"/>
+              </a:spcAft>
+            </a:pPr>
+            <a:r>
+              <a:rPr sz="2000" b="1">
+                <a:solidFill>
+                  <a:srgbClr val="F59E0B"/>
+                </a:solidFill>
+              </a:rPr>
+              <a:t>6.  </a:t>
+            </a:r>
+            <a:r>
+              <a:rPr sz="1600">
+                <a:solidFill>
+                  <a:srgbClr val="0F2040"/>
+                </a:solidFill>
+              </a:rPr>
+              <a:t>Apunta la cámara al QR del posto (10-15 cm de distancia)</a:t>
+            </a:r>
+          </a:p>
+          <a:p>
+            <a:pPr algn="l">
+              <a:lnSpc>
+                <a:spcPct val="150000"/>
+              </a:lnSpc>
+              <a:spcAft>
+                <a:spcPts val="1000"/>
+              </a:spcAft>
+            </a:pPr>
+            <a:r>
+              <a:rPr sz="2000" b="1">
+                <a:solidFill>
+                  <a:srgbClr val="F59E0B"/>
+                </a:solidFill>
+              </a:rPr>
+              <a:t>7.  </a:t>
+            </a:r>
+            <a:r>
+              <a:rPr sz="1600">
+                <a:solidFill>
+                  <a:srgbClr val="0F2040"/>
+                </a:solidFill>
+              </a:rPr>
+              <a:t>El sistema detecta el QR y registra automáticamente</a:t>
+            </a:r>
+          </a:p>
+          <a:p>
+            <a:pPr algn="l">
+              <a:lnSpc>
+                <a:spcPct val="150000"/>
+              </a:lnSpc>
+              <a:spcAft>
+                <a:spcPts val="1000"/>
+              </a:spcAft>
+            </a:pPr>
+            <a:r>
+              <a:rPr sz="2000" b="1">
+                <a:solidFill>
+                  <a:srgbClr val="F59E0B"/>
+                </a:solidFill>
+              </a:rPr>
+              <a:t>8.  </a:t>
+            </a:r>
+            <a:r>
+              <a:rPr sz="1600">
+                <a:solidFill>
+                  <a:srgbClr val="0F2040"/>
+                </a:solidFill>
+              </a:rPr>
+              <a:t>El celular vibra (corto = éxito) y aparece confirmación</a:t>
+            </a:r>
+          </a:p>
+        </p:txBody>
+      </p:sp>
+      <p:sp>
+        <p:nvSpPr>
+          <p:cNvPr id="7" name="Rectangle 6"/>
           <p:cNvSpPr/>
           <p:nvPr/>
         </p:nvSpPr>
@@ -4827,7 +4574,7 @@
       </p:sp>
       <p:sp>
         <p:nvSpPr>
-          <p:cNvPr id="10" name="TextBox 9"/>
+          <p:cNvPr id="8" name="TextBox 7"/>
           <p:cNvSpPr txBox="1"/>
           <p:nvPr/>
         </p:nvSpPr>
@@ -4862,226 +4609,7 @@
       </p:sp>
       <p:sp>
         <p:nvSpPr>
-          <p:cNvPr id="11" name="TextBox 10"/>
-          <p:cNvSpPr txBox="1"/>
-          <p:nvPr/>
-        </p:nvSpPr>
-        <p:spPr>
-          <a:xfrm>
-            <a:off x="7315200" y="6583680"/>
-            <a:ext cx="4572000" cy="274320"/>
-          </a:xfrm>
-          <a:prstGeom prst="rect">
-            <a:avLst/>
-          </a:prstGeom>
-          <a:noFill/>
-        </p:spPr>
-        <p:txBody>
-          <a:bodyPr wrap="square" anchor="ctr" lIns="45720" rIns="45720">
-            <a:spAutoFit/>
-          </a:bodyPr>
-          <a:lstStyle/>
-          <a:p>
-            <a:pPr algn="r"/>
-            <a:r>
-              <a:rPr sz="900" b="0">
-                <a:solidFill>
-                  <a:srgbClr val="F59E0B"/>
-                </a:solidFill>
-                <a:latin typeface="Calibri"/>
-              </a:rPr>
-              <a:t>https://condominios-cyj.vercel.app</a:t>
-            </a:r>
-          </a:p>
-        </p:txBody>
-      </p:sp>
-    </p:spTree>
-  </p:cSld>
-  <p:clrMapOvr>
-    <a:masterClrMapping/>
-  </p:clrMapOvr>
-</p:sld>
-</file>
-
-<file path=ppt/slides/slide4.xml><?xml version="1.0" encoding="utf-8"?>
-<p:sld xmlns:a="http://schemas.openxmlformats.org/drawingml/2006/main" xmlns:p="http://schemas.openxmlformats.org/presentationml/2006/main" xmlns:r="http://schemas.openxmlformats.org/officeDocument/2006/relationships">
-  <p:cSld>
-    <p:bg>
-      <p:bgPr>
-        <a:solidFill>
-          <a:srgbClr val="0F2040"/>
-        </a:solidFill>
-        <a:effectLst/>
-      </p:bgPr>
-    </p:bg>
-    <p:spTree>
-      <p:nvGrpSpPr>
-        <p:cNvPr id="1" name=""/>
-        <p:cNvGrpSpPr/>
-        <p:nvPr/>
-      </p:nvGrpSpPr>
-      <p:grpSpPr/>
-      <p:sp>
-        <p:nvSpPr>
-          <p:cNvPr id="2" name="Rectangle 1"/>
-          <p:cNvSpPr/>
-          <p:nvPr/>
-        </p:nvSpPr>
-        <p:spPr>
-          <a:xfrm>
-            <a:off x="0" y="3108960"/>
-            <a:ext cx="12191695" cy="73152"/>
-          </a:xfrm>
-          <a:prstGeom prst="rect">
-            <a:avLst/>
-          </a:prstGeom>
-          <a:solidFill>
-            <a:srgbClr val="F59E0B"/>
-          </a:solidFill>
-          <a:ln>
-            <a:noFill/>
-          </a:ln>
-          <a:effectLst/>
-        </p:spPr>
-        <p:style>
-          <a:lnRef idx="1">
-            <a:schemeClr val="accent1"/>
-          </a:lnRef>
-          <a:fillRef idx="3">
-            <a:schemeClr val="accent1"/>
-          </a:fillRef>
-          <a:effectRef idx="2">
-            <a:schemeClr val="accent1"/>
-          </a:effectRef>
-          <a:fontRef idx="minor">
-            <a:schemeClr val="lt1"/>
-          </a:fontRef>
-        </p:style>
-        <p:txBody>
-          <a:bodyPr rtlCol="0" anchor="ctr"/>
-          <a:lstStyle/>
-          <a:p>
-            <a:pPr algn="ctr"/>
-          </a:p>
-        </p:txBody>
-      </p:sp>
-      <p:sp>
-        <p:nvSpPr>
-          <p:cNvPr id="3" name="TextBox 2"/>
-          <p:cNvSpPr txBox="1"/>
-          <p:nvPr/>
-        </p:nvSpPr>
-        <p:spPr>
-          <a:xfrm>
-            <a:off x="731520" y="2560320"/>
-            <a:ext cx="10698480" cy="640080"/>
-          </a:xfrm>
-          <a:prstGeom prst="rect">
-            <a:avLst/>
-          </a:prstGeom>
-          <a:noFill/>
-        </p:spPr>
-        <p:txBody>
-          <a:bodyPr wrap="square" anchor="ctr" lIns="45720" rIns="45720">
-            <a:spAutoFit/>
-          </a:bodyPr>
-          <a:lstStyle/>
-          <a:p>
-            <a:pPr algn="ctr"/>
-            <a:r>
-              <a:rPr sz="3600" b="1">
-                <a:solidFill>
-                  <a:srgbClr val="FFFFFF"/>
-                </a:solidFill>
-                <a:latin typeface="Calibri"/>
-              </a:rPr>
-              <a:t>Cómo registrar una ronda</a:t>
-            </a:r>
-          </a:p>
-        </p:txBody>
-      </p:sp>
-      <p:sp>
-        <p:nvSpPr>
-          <p:cNvPr id="4" name="Rectangle 3"/>
-          <p:cNvSpPr/>
-          <p:nvPr/>
-        </p:nvSpPr>
-        <p:spPr>
-          <a:xfrm>
-            <a:off x="0" y="6583680"/>
-            <a:ext cx="12191695" cy="274320"/>
-          </a:xfrm>
-          <a:prstGeom prst="rect">
-            <a:avLst/>
-          </a:prstGeom>
-          <a:solidFill>
-            <a:srgbClr val="0F2040"/>
-          </a:solidFill>
-          <a:ln>
-            <a:noFill/>
-          </a:ln>
-          <a:effectLst/>
-        </p:spPr>
-        <p:style>
-          <a:lnRef idx="1">
-            <a:schemeClr val="accent1"/>
-          </a:lnRef>
-          <a:fillRef idx="3">
-            <a:schemeClr val="accent1"/>
-          </a:fillRef>
-          <a:effectRef idx="2">
-            <a:schemeClr val="accent1"/>
-          </a:effectRef>
-          <a:fontRef idx="minor">
-            <a:schemeClr val="lt1"/>
-          </a:fontRef>
-        </p:style>
-        <p:txBody>
-          <a:bodyPr rtlCol="0" anchor="ctr"/>
-          <a:lstStyle/>
-          <a:p>
-            <a:pPr algn="ctr"/>
-          </a:p>
-        </p:txBody>
-      </p:sp>
-      <p:sp>
-        <p:nvSpPr>
-          <p:cNvPr id="5" name="TextBox 4"/>
-          <p:cNvSpPr txBox="1"/>
-          <p:nvPr/>
-        </p:nvSpPr>
-        <p:spPr>
-          <a:xfrm>
-            <a:off x="365760" y="6583680"/>
-            <a:ext cx="6400800" cy="274320"/>
-          </a:xfrm>
-          <a:prstGeom prst="rect">
-            <a:avLst/>
-          </a:prstGeom>
-          <a:noFill/>
-        </p:spPr>
-        <p:txBody>
-          <a:bodyPr wrap="square" anchor="ctr" lIns="45720" rIns="45720">
-            <a:spAutoFit/>
-          </a:bodyPr>
-          <a:lstStyle/>
-          <a:p>
-            <a:pPr algn="l"/>
-            <a:r>
-              <a:rPr sz="900" b="0">
-                <a:solidFill>
-                  <a:srgbClr val="FFFFFF"/>
-                </a:solidFill>
-                <a:latin typeface="Calibri"/>
-              </a:rPr>
-              <a:t>Asesorías Integrales CyJ · Capacitación Guardia</a:t>
-            </a:r>
-          </a:p>
-        </p:txBody>
-      </p:sp>
-      <p:sp>
-        <p:nvSpPr>
-          <p:cNvPr id="6" name="TextBox 5"/>
+          <p:cNvPr id="9" name="TextBox 8"/>
           <p:cNvSpPr txBox="1"/>
           <p:nvPr/>
         </p:nvSpPr>
@@ -5214,7 +4742,7 @@
                 </a:solidFill>
                 <a:latin typeface="Calibri"/>
               </a:rPr>
-              <a:t>Flujo: Registrar Ronda</a:t>
+              <a:t>Requisitos técnicos</a:t>
             </a:r>
           </a:p>
         </p:txBody>
@@ -5256,330 +4784,20 @@
       </p:sp>
       <p:sp>
         <p:nvSpPr>
-          <p:cNvPr id="5" name="TextBox 4"/>
-          <p:cNvSpPr txBox="1"/>
-          <p:nvPr/>
-        </p:nvSpPr>
-        <p:spPr>
-          <a:xfrm>
-            <a:off x="457200" y="1005840"/>
-            <a:ext cx="11247120" cy="548640"/>
-          </a:xfrm>
-          <a:prstGeom prst="rect">
-            <a:avLst/>
-          </a:prstGeom>
-          <a:noFill/>
-        </p:spPr>
-        <p:txBody>
-          <a:bodyPr wrap="square" anchor="t" lIns="45720" rIns="45720">
-            <a:spAutoFit/>
-          </a:bodyPr>
-          <a:lstStyle/>
-          <a:p>
-            <a:pPr algn="l"/>
-            <a:r>
-              <a:rPr sz="1400" b="0">
-                <a:solidFill>
-                  <a:srgbClr val="666666"/>
-                </a:solidFill>
-                <a:latin typeface="Calibri"/>
-              </a:rPr>
-              <a:t>Pasos para registrar una ronda escaneando QR:</a:t>
-            </a:r>
-          </a:p>
-        </p:txBody>
-      </p:sp>
-      <p:sp>
-        <p:nvSpPr>
-          <p:cNvPr id="6" name="TextBox 5"/>
-          <p:cNvSpPr txBox="1"/>
-          <p:nvPr/>
-        </p:nvSpPr>
-        <p:spPr>
-          <a:xfrm>
-            <a:off x="640080" y="1645920"/>
-            <a:ext cx="10972800" cy="4572000"/>
-          </a:xfrm>
-          <a:prstGeom prst="rect">
-            <a:avLst/>
-          </a:prstGeom>
-          <a:noFill/>
-        </p:spPr>
-        <p:txBody>
-          <a:bodyPr wrap="square">
-            <a:spAutoFit/>
-          </a:bodyPr>
-          <a:lstStyle/>
-          <a:p>
-            <a:pPr algn="l">
-              <a:lnSpc>
-                <a:spcPct val="150000"/>
-              </a:lnSpc>
-              <a:spcAft>
-                <a:spcPts val="1000"/>
-              </a:spcAft>
-            </a:pPr>
-            <a:r>
-              <a:rPr sz="2000" b="1">
-                <a:solidFill>
-                  <a:srgbClr val="F59E0B"/>
-                </a:solidFill>
-                <a:latin typeface="Calibri"/>
-              </a:rPr>
-              <a:t>1.  </a:t>
-            </a:r>
-            <a:r>
-              <a:rPr sz="1600">
-                <a:solidFill>
-                  <a:srgbClr val="0F2040"/>
-                </a:solidFill>
-                <a:latin typeface="Calibri"/>
-              </a:rPr>
-              <a:t>Inicia sesión con tu email y contraseña</a:t>
-            </a:r>
-          </a:p>
-          <a:p>
-            <a:pPr algn="l">
-              <a:lnSpc>
-                <a:spcPct val="150000"/>
-              </a:lnSpc>
-              <a:spcAft>
-                <a:spcPts val="1000"/>
-              </a:spcAft>
-            </a:pPr>
-            <a:r>
-              <a:rPr sz="2000" b="1">
-                <a:solidFill>
-                  <a:srgbClr val="F59E0B"/>
-                </a:solidFill>
-                <a:latin typeface="Calibri"/>
-              </a:rPr>
-              <a:t>2.  </a:t>
-            </a:r>
-            <a:r>
-              <a:rPr sz="1600">
-                <a:solidFill>
-                  <a:srgbClr val="0F2040"/>
-                </a:solidFill>
-                <a:latin typeface="Calibri"/>
-              </a:rPr>
-              <a:t>Si es primer login, cambia tu contraseña temporal</a:t>
-            </a:r>
-          </a:p>
-          <a:p>
-            <a:pPr algn="l">
-              <a:lnSpc>
-                <a:spcPct val="150000"/>
-              </a:lnSpc>
-              <a:spcAft>
-                <a:spcPts val="1000"/>
-              </a:spcAft>
-            </a:pPr>
-            <a:r>
-              <a:rPr sz="2000" b="1">
-                <a:solidFill>
-                  <a:srgbClr val="F59E0B"/>
-                </a:solidFill>
-                <a:latin typeface="Calibri"/>
-              </a:rPr>
-              <a:t>3.  </a:t>
-            </a:r>
-            <a:r>
-              <a:rPr sz="1600">
-                <a:solidFill>
-                  <a:srgbClr val="0F2040"/>
-                </a:solidFill>
-                <a:latin typeface="Calibri"/>
-              </a:rPr>
-              <a:t>Serás redirigido automáticamente a /rondas-guardia</a:t>
-            </a:r>
-          </a:p>
-          <a:p>
-            <a:pPr algn="l">
-              <a:lnSpc>
-                <a:spcPct val="150000"/>
-              </a:lnSpc>
-              <a:spcAft>
-                <a:spcPts val="1000"/>
-              </a:spcAft>
-            </a:pPr>
-            <a:r>
-              <a:rPr sz="2000" b="1">
-                <a:solidFill>
-                  <a:srgbClr val="F59E0B"/>
-                </a:solidFill>
-                <a:latin typeface="Calibri"/>
-              </a:rPr>
-              <a:t>4.  </a:t>
-            </a:r>
-            <a:r>
-              <a:rPr sz="1600">
-                <a:solidFill>
-                  <a:srgbClr val="0F2040"/>
-                </a:solidFill>
-                <a:latin typeface="Calibri"/>
-              </a:rPr>
-              <a:t>Verás UN SOLO botón grande circular ámbar "REGISTRAR RONDA"</a:t>
-            </a:r>
-          </a:p>
-          <a:p>
-            <a:pPr algn="l">
-              <a:lnSpc>
-                <a:spcPct val="150000"/>
-              </a:lnSpc>
-              <a:spcAft>
-                <a:spcPts val="1000"/>
-              </a:spcAft>
-            </a:pPr>
-            <a:r>
-              <a:rPr sz="2000" b="1">
-                <a:solidFill>
-                  <a:srgbClr val="F59E0B"/>
-                </a:solidFill>
-                <a:latin typeface="Calibri"/>
-              </a:rPr>
-              <a:t>5.  </a:t>
-            </a:r>
-            <a:r>
-              <a:rPr sz="1600">
-                <a:solidFill>
-                  <a:srgbClr val="0F2040"/>
-                </a:solidFill>
-                <a:latin typeface="Calibri"/>
-              </a:rPr>
-              <a:t>Presiona el botón → el navegador pedirá permiso de cámara (acepta)</a:t>
-            </a:r>
-          </a:p>
-          <a:p>
-            <a:pPr algn="l">
-              <a:lnSpc>
-                <a:spcPct val="150000"/>
-              </a:lnSpc>
-              <a:spcAft>
-                <a:spcPts val="1000"/>
-              </a:spcAft>
-            </a:pPr>
-            <a:r>
-              <a:rPr sz="2000" b="1">
-                <a:solidFill>
-                  <a:srgbClr val="F59E0B"/>
-                </a:solidFill>
-                <a:latin typeface="Calibri"/>
-              </a:rPr>
-              <a:t>6.  </a:t>
-            </a:r>
-            <a:r>
-              <a:rPr sz="1600">
-                <a:solidFill>
-                  <a:srgbClr val="0F2040"/>
-                </a:solidFill>
-                <a:latin typeface="Calibri"/>
-              </a:rPr>
-              <a:t>Apunta la cámara al QR del posto (10-15 cm de distancia)</a:t>
-            </a:r>
-          </a:p>
-          <a:p>
-            <a:pPr algn="l">
-              <a:lnSpc>
-                <a:spcPct val="150000"/>
-              </a:lnSpc>
-              <a:spcAft>
-                <a:spcPts val="1000"/>
-              </a:spcAft>
-            </a:pPr>
-            <a:r>
-              <a:rPr sz="2000" b="1">
-                <a:solidFill>
-                  <a:srgbClr val="F59E0B"/>
-                </a:solidFill>
-                <a:latin typeface="Calibri"/>
-              </a:rPr>
-              <a:t>7.  </a:t>
-            </a:r>
-            <a:r>
-              <a:rPr sz="1600">
-                <a:solidFill>
-                  <a:srgbClr val="0F2040"/>
-                </a:solidFill>
-                <a:latin typeface="Calibri"/>
-              </a:rPr>
-              <a:t>El sistema detecta el QR y registra automáticamente</a:t>
-            </a:r>
-          </a:p>
-          <a:p>
-            <a:pPr algn="l">
-              <a:lnSpc>
-                <a:spcPct val="150000"/>
-              </a:lnSpc>
-              <a:spcAft>
-                <a:spcPts val="1000"/>
-              </a:spcAft>
-            </a:pPr>
-            <a:r>
-              <a:rPr sz="2000" b="1">
-                <a:solidFill>
-                  <a:srgbClr val="F59E0B"/>
-                </a:solidFill>
-                <a:latin typeface="Calibri"/>
-              </a:rPr>
-              <a:t>8.  </a:t>
-            </a:r>
-            <a:r>
-              <a:rPr sz="1600">
-                <a:solidFill>
-                  <a:srgbClr val="0F2040"/>
-                </a:solidFill>
-                <a:latin typeface="Calibri"/>
-              </a:rPr>
-              <a:t>El celular vibra (corto = éxito) y aparece confirmación</a:t>
-            </a:r>
-          </a:p>
-          <a:p>
-            <a:pPr algn="l">
-              <a:lnSpc>
-                <a:spcPct val="150000"/>
-              </a:lnSpc>
-              <a:spcAft>
-                <a:spcPts val="1000"/>
-              </a:spcAft>
-            </a:pPr>
-            <a:r>
-              <a:rPr sz="2000" b="1">
-                <a:solidFill>
-                  <a:srgbClr val="F59E0B"/>
-                </a:solidFill>
-                <a:latin typeface="Calibri"/>
-              </a:rPr>
-              <a:t>9.  </a:t>
-            </a:r>
-            <a:r>
-              <a:rPr sz="1600">
-                <a:solidFill>
-                  <a:srgbClr val="0F2040"/>
-                </a:solidFill>
-                <a:latin typeface="Calibri"/>
-              </a:rPr>
-              <a:t>Puedes escanear varios postos en secuencia sin cerrar la cámara</a:t>
-            </a:r>
-          </a:p>
-        </p:txBody>
-      </p:sp>
-      <p:sp>
-        <p:nvSpPr>
-          <p:cNvPr id="7" name="Rectangle 6"/>
+          <p:cNvPr id="5" name="Rounded Rectangle 4"/>
           <p:cNvSpPr/>
           <p:nvPr/>
         </p:nvSpPr>
         <p:spPr>
           <a:xfrm>
-            <a:off x="0" y="6583680"/>
-            <a:ext cx="12191695" cy="274320"/>
-          </a:xfrm>
-          <a:prstGeom prst="rect">
+            <a:off x="914400" y="1828800"/>
+            <a:ext cx="10332720" cy="3200400"/>
+          </a:xfrm>
+          <a:prstGeom prst="roundRect">
             <a:avLst/>
           </a:prstGeom>
           <a:solidFill>
-            <a:srgbClr val="0F2040"/>
+            <a:srgbClr val="F1F5F9"/>
           </a:solidFill>
           <a:ln>
             <a:noFill/>
@@ -5610,14 +4828,58 @@
       </p:sp>
       <p:sp>
         <p:nvSpPr>
-          <p:cNvPr id="8" name="TextBox 7"/>
+          <p:cNvPr id="6" name="Rectangle 5"/>
+          <p:cNvSpPr/>
+          <p:nvPr/>
+        </p:nvSpPr>
+        <p:spPr>
+          <a:xfrm>
+            <a:off x="914400" y="1828800"/>
+            <a:ext cx="137160" cy="3200400"/>
+          </a:xfrm>
+          <a:prstGeom prst="rect">
+            <a:avLst/>
+          </a:prstGeom>
+          <a:solidFill>
+            <a:srgbClr val="F59E0B"/>
+          </a:solidFill>
+          <a:ln>
+            <a:noFill/>
+          </a:ln>
+          <a:effectLst/>
+        </p:spPr>
+        <p:style>
+          <a:lnRef idx="1">
+            <a:schemeClr val="accent1"/>
+          </a:lnRef>
+          <a:fillRef idx="3">
+            <a:schemeClr val="accent1"/>
+          </a:fillRef>
+          <a:effectRef idx="2">
+            <a:schemeClr val="accent1"/>
+          </a:effectRef>
+          <a:fontRef idx="minor">
+            <a:schemeClr val="lt1"/>
+          </a:fontRef>
+        </p:style>
+        <p:txBody>
+          <a:bodyPr rtlCol="0" anchor="ctr"/>
+          <a:lstStyle/>
+          <a:p>
+            <a:pPr algn="ctr"/>
+          </a:p>
+        </p:txBody>
+      </p:sp>
+      <p:sp>
+        <p:nvSpPr>
+          <p:cNvPr id="7" name="TextBox 6"/>
           <p:cNvSpPr txBox="1"/>
           <p:nvPr/>
         </p:nvSpPr>
         <p:spPr>
           <a:xfrm>
-            <a:off x="365760" y="6583680"/>
-            <a:ext cx="6400800" cy="274320"/>
+            <a:off x="1371600" y="2103120"/>
+            <a:ext cx="1828800" cy="1828800"/>
           </a:xfrm>
           <a:prstGeom prst="rect">
             <a:avLst/>
@@ -5630,8 +4892,127 @@
           </a:bodyPr>
           <a:lstStyle/>
           <a:p>
+            <a:pPr algn="ctr"/>
+            <a:r>
+              <a:rPr sz="8000" b="0">
+                <a:solidFill>
+                  <a:srgbClr val="F59E0B"/>
+                </a:solidFill>
+                <a:latin typeface="Calibri"/>
+              </a:rPr>
+              <a:t>⚠️</a:t>
+            </a:r>
+          </a:p>
+        </p:txBody>
+      </p:sp>
+      <p:sp>
+        <p:nvSpPr>
+          <p:cNvPr id="8" name="TextBox 7"/>
+          <p:cNvSpPr txBox="1"/>
+          <p:nvPr/>
+        </p:nvSpPr>
+        <p:spPr>
+          <a:xfrm>
+            <a:off x="3474720" y="2103120"/>
+            <a:ext cx="7498079" cy="2743200"/>
+          </a:xfrm>
+          <a:prstGeom prst="rect">
+            <a:avLst/>
+          </a:prstGeom>
+          <a:noFill/>
+        </p:spPr>
+        <p:txBody>
+          <a:bodyPr wrap="square" anchor="ctr" lIns="45720" rIns="45720">
+            <a:spAutoFit/>
+          </a:bodyPr>
+          <a:lstStyle/>
+          <a:p>
             <a:pPr algn="l"/>
             <a:r>
+              <a:rPr sz="1800" b="0">
+                <a:solidFill>
+                  <a:srgbClr val="0F2040"/>
+                </a:solidFill>
+                <a:latin typeface="Calibri"/>
+              </a:rPr>
+              <a:t>📱 Celular con cámara (preferentemente trasera)
+🌐 Conexión a internet
+🔒 Permiso de cámara concedido
+🌐 Acceder por HTTPS
+🔋 Batería suficiente (&gt;50%)
+🌐 Navegador moderno (Chrome, Safari, Firefox)</a:t>
+            </a:r>
+          </a:p>
+        </p:txBody>
+      </p:sp>
+      <p:sp>
+        <p:nvSpPr>
+          <p:cNvPr id="9" name="Rectangle 8"/>
+          <p:cNvSpPr/>
+          <p:nvPr/>
+        </p:nvSpPr>
+        <p:spPr>
+          <a:xfrm>
+            <a:off x="0" y="6583680"/>
+            <a:ext cx="12191695" cy="274320"/>
+          </a:xfrm>
+          <a:prstGeom prst="rect">
+            <a:avLst/>
+          </a:prstGeom>
+          <a:solidFill>
+            <a:srgbClr val="0F2040"/>
+          </a:solidFill>
+          <a:ln>
+            <a:noFill/>
+          </a:ln>
+          <a:effectLst/>
+        </p:spPr>
+        <p:style>
+          <a:lnRef idx="1">
+            <a:schemeClr val="accent1"/>
+          </a:lnRef>
+          <a:fillRef idx="3">
+            <a:schemeClr val="accent1"/>
+          </a:fillRef>
+          <a:effectRef idx="2">
+            <a:schemeClr val="accent1"/>
+          </a:effectRef>
+          <a:fontRef idx="minor">
+            <a:schemeClr val="lt1"/>
+          </a:fontRef>
+        </p:style>
+        <p:txBody>
+          <a:bodyPr rtlCol="0" anchor="ctr"/>
+          <a:lstStyle/>
+          <a:p>
+            <a:pPr algn="ctr"/>
+          </a:p>
+        </p:txBody>
+      </p:sp>
+      <p:sp>
+        <p:nvSpPr>
+          <p:cNvPr id="10" name="TextBox 9"/>
+          <p:cNvSpPr txBox="1"/>
+          <p:nvPr/>
+        </p:nvSpPr>
+        <p:spPr>
+          <a:xfrm>
+            <a:off x="365760" y="6583680"/>
+            <a:ext cx="6400800" cy="274320"/>
+          </a:xfrm>
+          <a:prstGeom prst="rect">
+            <a:avLst/>
+          </a:prstGeom>
+          <a:noFill/>
+        </p:spPr>
+        <p:txBody>
+          <a:bodyPr wrap="square" anchor="ctr" lIns="45720" rIns="45720">
+            <a:spAutoFit/>
+          </a:bodyPr>
+          <a:lstStyle/>
+          <a:p>
+            <a:pPr algn="l"/>
+            <a:r>
               <a:rPr sz="900" b="0">
                 <a:solidFill>
                   <a:srgbClr val="FFFFFF"/>
@@ -5645,7 +5026,7 @@
       </p:sp>
       <p:sp>
         <p:nvSpPr>
-          <p:cNvPr id="9" name="TextBox 8"/>
+          <p:cNvPr id="11" name="TextBox 10"/>
           <p:cNvSpPr txBox="1"/>
           <p:nvPr/>
         </p:nvSpPr>
@@ -5778,7 +5159,7 @@
                 </a:solidFill>
                 <a:latin typeface="Calibri"/>
               </a:rPr>
-              <a:t>Lo que se registra automáticamente</a:t>
+              <a:t>Solución de problemas</a:t>
             </a:r>
           </a:p>
         </p:txBody>
@@ -5826,14 +5207,14 @@
         </p:nvSpPr>
         <p:spPr>
           <a:xfrm>
-            <a:off x="365760" y="1097280"/>
-            <a:ext cx="5577840" cy="548640"/>
+            <a:off x="914400" y="1828800"/>
+            <a:ext cx="10332720" cy="3200400"/>
           </a:xfrm>
           <a:prstGeom prst="roundRect">
             <a:avLst/>
           </a:prstGeom>
           <a:solidFill>
-            <a:srgbClr val="F59E0B"/>
+            <a:srgbClr val="F1F5F9"/>
           </a:solidFill>
           <a:ln>
             <a:noFill/>
@@ -5864,274 +5245,20 @@
       </p:sp>
       <p:sp>
         <p:nvSpPr>
-          <p:cNvPr id="6" name="TextBox 5"/>
-          <p:cNvSpPr txBox="1"/>
-          <p:nvPr/>
-        </p:nvSpPr>
-        <p:spPr>
-          <a:xfrm>
-            <a:off x="365760" y="1097280"/>
-            <a:ext cx="5577840" cy="548640"/>
-          </a:xfrm>
-          <a:prstGeom prst="rect">
-            <a:avLst/>
-          </a:prstGeom>
-          <a:noFill/>
-        </p:spPr>
-        <p:txBody>
-          <a:bodyPr wrap="square" anchor="ctr" lIns="45720" rIns="45720">
-            <a:spAutoFit/>
-          </a:bodyPr>
-          <a:lstStyle/>
-          <a:p>
-            <a:pPr algn="ctr"/>
-            <a:r>
-              <a:rPr sz="1800" b="1">
-                <a:solidFill>
-                  <a:srgbClr val="FFFFFF"/>
-                </a:solidFill>
-                <a:latin typeface="Calibri"/>
-              </a:rPr>
-              <a:t>Cada vez que escaneas un QR, se guarda:</a:t>
-            </a:r>
-          </a:p>
-        </p:txBody>
-      </p:sp>
-      <p:sp>
-        <p:nvSpPr>
-          <p:cNvPr id="7" name="TextBox 6"/>
-          <p:cNvSpPr txBox="1"/>
-          <p:nvPr/>
-        </p:nvSpPr>
-        <p:spPr>
-          <a:xfrm>
-            <a:off x="457200" y="1828800"/>
-            <a:ext cx="5394960" cy="4572000"/>
-          </a:xfrm>
-          <a:prstGeom prst="rect">
-            <a:avLst/>
-          </a:prstGeom>
-          <a:noFill/>
-        </p:spPr>
-        <p:txBody>
-          <a:bodyPr wrap="square">
-            <a:spAutoFit/>
-          </a:bodyPr>
-          <a:lstStyle/>
-          <a:p>
-            <a:pPr algn="l">
-              <a:lnSpc>
-                <a:spcPct val="140000"/>
-              </a:lnSpc>
-              <a:spcAft>
-                <a:spcPts val="800"/>
-              </a:spcAft>
-            </a:pPr>
-            <a:r>
-              <a:rPr sz="1400" b="1">
-                <a:solidFill>
-                  <a:srgbClr val="F59E0B"/>
-                </a:solidFill>
-                <a:latin typeface="Calibri"/>
-              </a:rPr>
-              <a:t>● </a:t>
-            </a:r>
-            <a:r>
-              <a:rPr sz="1400">
-                <a:solidFill>
-                  <a:srgbClr val="0F2040"/>
-                </a:solidFill>
-                <a:latin typeface="Calibri"/>
-              </a:rPr>
-              <a:t>Ronda (nombre y código)</a:t>
-            </a:r>
-          </a:p>
-          <a:p>
-            <a:pPr algn="l">
-              <a:lnSpc>
-                <a:spcPct val="140000"/>
-              </a:lnSpc>
-              <a:spcAft>
-                <a:spcPts val="800"/>
-              </a:spcAft>
-            </a:pPr>
-            <a:r>
-              <a:rPr sz="1400" b="1">
-                <a:solidFill>
-                  <a:srgbClr val="F59E0B"/>
-                </a:solidFill>
-                <a:latin typeface="Calibri"/>
-              </a:rPr>
-              <a:t>● </a:t>
-            </a:r>
-            <a:r>
-              <a:rPr sz="1400">
-                <a:solidFill>
-                  <a:srgbClr val="0F2040"/>
-                </a:solidFill>
-                <a:latin typeface="Calibri"/>
-              </a:rPr>
-              <a:t>Etapa (ALBATROS, BANDURRIAS, BECACINAS, etc.)</a:t>
-            </a:r>
-          </a:p>
-          <a:p>
-            <a:pPr algn="l">
-              <a:lnSpc>
-                <a:spcPct val="140000"/>
-              </a:lnSpc>
-              <a:spcAft>
-                <a:spcPts val="800"/>
-              </a:spcAft>
-            </a:pPr>
-            <a:r>
-              <a:rPr sz="1400" b="1">
-                <a:solidFill>
-                  <a:srgbClr val="F59E0B"/>
-                </a:solidFill>
-                <a:latin typeface="Calibri"/>
-              </a:rPr>
-              <a:t>● </a:t>
-            </a:r>
-            <a:r>
-              <a:rPr sz="1400">
-                <a:solidFill>
-                  <a:srgbClr val="0F2040"/>
-                </a:solidFill>
-                <a:latin typeface="Calibri"/>
-              </a:rPr>
-              <a:t>Posto (1, 2, 3 o 4)</a:t>
-            </a:r>
-          </a:p>
-          <a:p>
-            <a:pPr algn="l">
-              <a:lnSpc>
-                <a:spcPct val="140000"/>
-              </a:lnSpc>
-              <a:spcAft>
-                <a:spcPts val="800"/>
-              </a:spcAft>
-            </a:pPr>
-            <a:r>
-              <a:rPr sz="1400" b="1">
-                <a:solidFill>
-                  <a:srgbClr val="F59E0B"/>
-                </a:solidFill>
-                <a:latin typeface="Calibri"/>
-              </a:rPr>
-              <a:t>● </a:t>
-            </a:r>
-            <a:r>
-              <a:rPr sz="1400">
-                <a:solidFill>
-                  <a:srgbClr val="0F2040"/>
-                </a:solidFill>
-                <a:latin typeface="Calibri"/>
-              </a:rPr>
-              <a:t>Fecha (YYYY-MM-DD)</a:t>
-            </a:r>
-          </a:p>
-          <a:p>
-            <a:pPr algn="l">
-              <a:lnSpc>
-                <a:spcPct val="140000"/>
-              </a:lnSpc>
-              <a:spcAft>
-                <a:spcPts val="800"/>
-              </a:spcAft>
-            </a:pPr>
-            <a:r>
-              <a:rPr sz="1400" b="1">
-                <a:solidFill>
-                  <a:srgbClr val="F59E0B"/>
-                </a:solidFill>
-                <a:latin typeface="Calibri"/>
-              </a:rPr>
-              <a:t>● </a:t>
-            </a:r>
-            <a:r>
-              <a:rPr sz="1400">
-                <a:solidFill>
-                  <a:srgbClr val="0F2040"/>
-                </a:solidFill>
-                <a:latin typeface="Calibri"/>
-              </a:rPr>
-              <a:t>Hora (HH:MM)</a:t>
-            </a:r>
-          </a:p>
-          <a:p>
-            <a:pPr algn="l">
-              <a:lnSpc>
-                <a:spcPct val="140000"/>
-              </a:lnSpc>
-              <a:spcAft>
-                <a:spcPts val="800"/>
-              </a:spcAft>
-            </a:pPr>
-            <a:r>
-              <a:rPr sz="1400" b="1">
-                <a:solidFill>
-                  <a:srgbClr val="F59E0B"/>
-                </a:solidFill>
-                <a:latin typeface="Calibri"/>
-              </a:rPr>
-              <a:t>● </a:t>
-            </a:r>
-            <a:r>
-              <a:rPr sz="1400">
-                <a:solidFill>
-                  <a:srgbClr val="0F2040"/>
-                </a:solidFill>
-                <a:latin typeface="Calibri"/>
-              </a:rPr>
-              <a:t>Usuario que escaneó (tú)</a:t>
-            </a:r>
-          </a:p>
-          <a:p>
-            <a:pPr algn="l">
-              <a:lnSpc>
-                <a:spcPct val="140000"/>
-              </a:lnSpc>
-              <a:spcAft>
-                <a:spcPts val="800"/>
-              </a:spcAft>
-            </a:pPr>
-            <a:r>
-              <a:rPr sz="1400" b="1">
-                <a:solidFill>
-                  <a:srgbClr val="F59E0B"/>
-                </a:solidFill>
-                <a:latin typeface="Calibri"/>
-              </a:rPr>
-              <a:t>● </a:t>
-            </a:r>
-            <a:r>
-              <a:rPr sz="1400">
-                <a:solidFill>
-                  <a:srgbClr val="0F2040"/>
-                </a:solidFill>
-                <a:latin typeface="Calibri"/>
-              </a:rPr>
-              <a:t>Ubicación legible ("Etapa X · Posto #Y")</a:t>
-            </a:r>
-          </a:p>
-        </p:txBody>
-      </p:sp>
-      <p:sp>
-        <p:nvSpPr>
-          <p:cNvPr id="8" name="Rounded Rectangle 7"/>
+          <p:cNvPr id="6" name="Rectangle 5"/>
           <p:cNvSpPr/>
           <p:nvPr/>
         </p:nvSpPr>
         <p:spPr>
           <a:xfrm>
-            <a:off x="6217920" y="1097280"/>
-            <a:ext cx="5577840" cy="548640"/>
-          </a:xfrm>
-          <a:prstGeom prst="roundRect">
+            <a:off x="914400" y="1828800"/>
+            <a:ext cx="137160" cy="3200400"/>
+          </a:xfrm>
+          <a:prstGeom prst="rect">
             <a:avLst/>
           </a:prstGeom>
           <a:solidFill>
-            <a:srgbClr val="0A1172"/>
+            <a:srgbClr val="0369A1"/>
           </a:solidFill>
           <a:ln>
             <a:noFill/>
@@ -6162,14 +5289,14 @@
       </p:sp>
       <p:sp>
         <p:nvSpPr>
-          <p:cNvPr id="9" name="TextBox 8"/>
+          <p:cNvPr id="7" name="TextBox 6"/>
           <p:cNvSpPr txBox="1"/>
           <p:nvPr/>
         </p:nvSpPr>
         <p:spPr>
           <a:xfrm>
-            <a:off x="6217920" y="1097280"/>
-            <a:ext cx="5577840" cy="548640"/>
+            <a:off x="1371600" y="2103120"/>
+            <a:ext cx="1828800" cy="1828800"/>
           </a:xfrm>
           <a:prstGeom prst="rect">
             <a:avLst/>
@@ -6184,27 +5311,27 @@
           <a:p>
             <a:pPr algn="ctr"/>
             <a:r>
-              <a:rPr sz="1800" b="1">
-                <a:solidFill>
-                  <a:srgbClr val="FFFFFF"/>
+              <a:rPr sz="8000" b="0">
+                <a:solidFill>
+                  <a:srgbClr val="0369A1"/>
                 </a:solidFill>
                 <a:latin typeface="Calibri"/>
               </a:rPr>
-              <a:t>Feedback que recibes:</a:t>
-            </a:r>
-          </a:p>
-        </p:txBody>
-      </p:sp>
-      <p:sp>
-        <p:nvSpPr>
-          <p:cNvPr id="10" name="TextBox 9"/>
+              <a:t>ℹ️</a:t>
+            </a:r>
+          </a:p>
+        </p:txBody>
+      </p:sp>
+      <p:sp>
+        <p:nvSpPr>
+          <p:cNvPr id="8" name="TextBox 7"/>
           <p:cNvSpPr txBox="1"/>
           <p:nvPr/>
         </p:nvSpPr>
         <p:spPr>
           <a:xfrm>
-            <a:off x="6309360" y="1828800"/>
-            <a:ext cx="5394960" cy="4572000"/>
+            <a:off x="3474720" y="2103120"/>
+            <a:ext cx="7498079" cy="2743200"/>
           </a:xfrm>
           <a:prstGeom prst="rect">
             <a:avLst/>
@@ -6212,211 +5339,27 @@
           <a:noFill/>
         </p:spPr>
         <p:txBody>
-          <a:bodyPr wrap="square">
+          <a:bodyPr wrap="square" anchor="ctr" lIns="45720" rIns="45720">
             <a:spAutoFit/>
           </a:bodyPr>
           <a:lstStyle/>
           <a:p>
-            <a:pPr algn="l">
-              <a:lnSpc>
-                <a:spcPct val="140000"/>
-              </a:lnSpc>
-              <a:spcAft>
-                <a:spcPts val="800"/>
-              </a:spcAft>
-            </a:pPr>
-            <a:r>
-              <a:rPr sz="1400" b="1">
-                <a:solidFill>
-                  <a:srgbClr val="0A1172"/>
+            <a:pPr algn="l"/>
+            <a:r>
+              <a:rPr sz="1800" b="0">
+                <a:solidFill>
+                  <a:srgbClr val="0F2040"/>
                 </a:solidFill>
                 <a:latin typeface="Calibri"/>
               </a:rPr>
-              <a:t>● </a:t>
-            </a:r>
-            <a:r>
-              <a:rPr sz="1400">
-                <a:solidFill>
-                  <a:srgbClr val="0F2040"/>
-                </a:solidFill>
-                <a:latin typeface="Calibri"/>
-              </a:rPr>
-              <a:t>Vibración corta = registro exitoso</a:t>
-            </a:r>
-          </a:p>
-          <a:p>
-            <a:pPr algn="l">
-              <a:lnSpc>
-                <a:spcPct val="140000"/>
-              </a:lnSpc>
-              <a:spcAft>
-                <a:spcPts val="800"/>
-              </a:spcAft>
-            </a:pPr>
-            <a:r>
-              <a:rPr sz="1400" b="1">
-                <a:solidFill>
-                  <a:srgbClr val="0A1172"/>
-                </a:solidFill>
-                <a:latin typeface="Calibri"/>
-              </a:rPr>
-              <a:t>● </a:t>
-            </a:r>
-            <a:r>
-              <a:rPr sz="1400">
-                <a:solidFill>
-                  <a:srgbClr val="0F2040"/>
-                </a:solidFill>
-                <a:latin typeface="Calibri"/>
-              </a:rPr>
-              <a:t>Vibración larga + pausa = error (QR inválido)</a:t>
-            </a:r>
-          </a:p>
-          <a:p>
-            <a:pPr algn="l">
-              <a:lnSpc>
-                <a:spcPct val="140000"/>
-              </a:lnSpc>
-              <a:spcAft>
-                <a:spcPts val="800"/>
-              </a:spcAft>
-            </a:pPr>
-            <a:r>
-              <a:rPr sz="1400" b="1">
-                <a:solidFill>
-                  <a:srgbClr val="0A1172"/>
-                </a:solidFill>
-                <a:latin typeface="Calibri"/>
-              </a:rPr>
-              <a:t>● </a:t>
-            </a:r>
-            <a:r>
-              <a:rPr sz="1400">
-                <a:solidFill>
-                  <a:srgbClr val="0F2040"/>
-                </a:solidFill>
-                <a:latin typeface="Calibri"/>
-              </a:rPr>
-              <a:t>Tarjeta verde con etapa, posto, fecha y hora</a:t>
-            </a:r>
-          </a:p>
-          <a:p>
-            <a:pPr algn="l">
-              <a:lnSpc>
-                <a:spcPct val="140000"/>
-              </a:lnSpc>
-              <a:spcAft>
-                <a:spcPts val="800"/>
-              </a:spcAft>
-            </a:pPr>
-            <a:r>
-              <a:rPr sz="1400" b="1">
-                <a:solidFill>
-                  <a:srgbClr val="0A1172"/>
-                </a:solidFill>
-                <a:latin typeface="Calibri"/>
-              </a:rPr>
-              <a:t>● </a:t>
-            </a:r>
-            <a:r>
-              <a:rPr sz="1400">
-                <a:solidFill>
-                  <a:srgbClr val="0F2040"/>
-                </a:solidFill>
-                <a:latin typeface="Calibri"/>
-              </a:rPr>
-              <a:t>Feed discreto con últimos 3 registros</a:t>
-            </a:r>
-          </a:p>
-          <a:p>
-            <a:pPr algn="l">
-              <a:lnSpc>
-                <a:spcPct val="140000"/>
-              </a:lnSpc>
-              <a:spcAft>
-                <a:spcPts val="800"/>
-              </a:spcAft>
-            </a:pPr>
-            <a:r>
-              <a:rPr sz="1400" b="1">
-                <a:solidFill>
-                  <a:srgbClr val="0A1172"/>
-                </a:solidFill>
-                <a:latin typeface="Calibri"/>
-              </a:rPr>
-              <a:t>● </a:t>
-            </a:r>
-            <a:r>
-              <a:rPr sz="1400">
-                <a:solidFill>
-                  <a:srgbClr val="0F2040"/>
-                </a:solidFill>
-                <a:latin typeface="Calibri"/>
-              </a:rPr>
-              <a:t>Botón "Reiniciar" si la cámara se bloquea</a:t>
-            </a:r>
-          </a:p>
-          <a:p>
-            <a:pPr algn="l">
-              <a:lnSpc>
-                <a:spcPct val="140000"/>
-              </a:lnSpc>
-              <a:spcAft>
-                <a:spcPts val="800"/>
-              </a:spcAft>
-            </a:pPr>
-            <a:r>
-              <a:rPr sz="1400" b="1">
-                <a:solidFill>
-                  <a:srgbClr val="0A1172"/>
-                </a:solidFill>
-                <a:latin typeface="Calibri"/>
-              </a:rPr>
-              <a:t>● </a:t>
-            </a:r>
-            <a:r>
-              <a:rPr sz="1400">
-                <a:solidFill>
-                  <a:srgbClr val="0F2040"/>
-                </a:solidFill>
-                <a:latin typeface="Calibri"/>
-              </a:rPr>
-              <a:t>Botón "Cambiar cámara" (frontal/trasera)</a:t>
-            </a:r>
-          </a:p>
-          <a:p>
-            <a:pPr algn="l">
-              <a:lnSpc>
-                <a:spcPct val="140000"/>
-              </a:lnSpc>
-              <a:spcAft>
-                <a:spcPts val="800"/>
-              </a:spcAft>
-            </a:pPr>
-            <a:r>
-              <a:rPr sz="1400" b="1">
-                <a:solidFill>
-                  <a:srgbClr val="0A1172"/>
-                </a:solidFill>
-                <a:latin typeface="Calibri"/>
-              </a:rPr>
-              <a:t>● </a:t>
-            </a:r>
-            <a:r>
-              <a:rPr sz="1400">
-                <a:solidFill>
-                  <a:srgbClr val="0F2040"/>
-                </a:solidFill>
-                <a:latin typeface="Calibri"/>
-              </a:rPr>
-              <a:t>Botón "Manual" si no hay cámara (ingreso manual)</a:t>
-            </a:r>
-          </a:p>
-        </p:txBody>
-      </p:sp>
-      <p:sp>
-        <p:nvSpPr>
-          <p:cNvPr id="11" name="Rectangle 10"/>
+              <a:t>Si la cámara no abre: verifica HTTPS, revisa permisos del navegador, prueba "Reiniciar", o usa "Ingreso manual". Si el QR no se detecta: acerca a 10-15 cm, limpia el lente, asegúrate de que el QR no esté dañado.</a:t>
+            </a:r>
+          </a:p>
+        </p:txBody>
+      </p:sp>
+      <p:sp>
+        <p:nvSpPr>
+          <p:cNvPr id="9" name="Rectangle 8"/>
           <p:cNvSpPr/>
           <p:nvPr/>
         </p:nvSpPr>
@@ -6460,7 +5403,7 @@
       </p:sp>
       <p:sp>
         <p:nvSpPr>
-          <p:cNvPr id="12" name="TextBox 11"/>
+          <p:cNvPr id="10" name="TextBox 9"/>
           <p:cNvSpPr txBox="1"/>
           <p:nvPr/>
         </p:nvSpPr>
@@ -6495,7 +5438,7 @@
       </p:sp>
       <p:sp>
         <p:nvSpPr>
-          <p:cNvPr id="13" name="TextBox 12"/>
+          <p:cNvPr id="11" name="TextBox 10"/>
           <p:cNvSpPr txBox="1"/>
           <p:nvPr/>
         </p:nvSpPr>
@@ -6628,7 +5571,7 @@
                 </a:solidFill>
                 <a:latin typeface="Calibri"/>
               </a:rPr>
-              <a:t>Requisitos técnicos</a:t>
+              <a:t>Manuales del Guardia</a:t>
             </a:r>
           </a:p>
         </p:txBody>
@@ -6668,22 +5611,81 @@
           </a:p>
         </p:txBody>
       </p:sp>
-      <p:sp>
-        <p:nvSpPr>
-          <p:cNvPr id="5" name="Rounded Rectangle 4"/>
+      <p:pic>
+        <p:nvPicPr>
+          <p:cNvPr id="5" name="Picture 4" descr="15_guardia_manuales.png"/>
+          <p:cNvPicPr>
+            <a:picLocks noChangeAspect="1"/>
+          </p:cNvPicPr>
+          <p:nvPr/>
+        </p:nvPicPr>
+        <p:blipFill>
+          <a:blip r:embed="rId2"/>
+          <a:stretch>
+            <a:fillRect/>
+          </a:stretch>
+        </p:blipFill>
+        <p:spPr>
+          <a:xfrm>
+            <a:off x="1386687" y="1097280"/>
+            <a:ext cx="9418320" cy="5886450"/>
+          </a:xfrm>
+          <a:prstGeom prst="rect">
+            <a:avLst/>
+          </a:prstGeom>
+        </p:spPr>
+      </p:pic>
+      <p:sp>
+        <p:nvSpPr>
+          <p:cNvPr id="6" name="TextBox 5"/>
+          <p:cNvSpPr txBox="1"/>
+          <p:nvPr/>
+        </p:nvSpPr>
+        <p:spPr>
+          <a:xfrm>
+            <a:off x="914400" y="6035040"/>
+            <a:ext cx="10332720" cy="457200"/>
+          </a:xfrm>
+          <a:prstGeom prst="rect">
+            <a:avLst/>
+          </a:prstGeom>
+          <a:noFill/>
+        </p:spPr>
+        <p:txBody>
+          <a:bodyPr wrap="square" anchor="ctr" lIns="45720" rIns="45720">
+            <a:spAutoFit/>
+          </a:bodyPr>
+          <a:lstStyle/>
+          <a:p>
+            <a:pPr algn="ctr"/>
+            <a:r>
+              <a:rPr sz="1200" b="0">
+                <a:solidFill>
+                  <a:srgbClr val="666666"/>
+                </a:solidFill>
+                <a:latin typeface="Calibri"/>
+              </a:rPr>
+              <a:t>Página /manuales-guardia — descarga tu capacitación y el manual</a:t>
+            </a:r>
+          </a:p>
+        </p:txBody>
+      </p:sp>
+      <p:sp>
+        <p:nvSpPr>
+          <p:cNvPr id="7" name="Rectangle 6"/>
           <p:cNvSpPr/>
           <p:nvPr/>
         </p:nvSpPr>
         <p:spPr>
           <a:xfrm>
-            <a:off x="914400" y="1828800"/>
-            <a:ext cx="10332720" cy="3200400"/>
-          </a:xfrm>
-          <a:prstGeom prst="roundRect">
+            <a:off x="0" y="6583680"/>
+            <a:ext cx="12191695" cy="274320"/>
+          </a:xfrm>
+          <a:prstGeom prst="rect">
             <a:avLst/>
           </a:prstGeom>
           <a:solidFill>
-            <a:srgbClr val="F1F5F9"/>
+            <a:srgbClr val="0F2040"/>
           </a:solidFill>
           <a:ln>
             <a:noFill/>
@@ -6714,58 +5716,14 @@
       </p:sp>
       <p:sp>
         <p:nvSpPr>
-          <p:cNvPr id="6" name="Rectangle 5"/>
-          <p:cNvSpPr/>
-          <p:nvPr/>
-        </p:nvSpPr>
-        <p:spPr>
-          <a:xfrm>
-            <a:off x="914400" y="1828800"/>
-            <a:ext cx="137160" cy="3200400"/>
-          </a:xfrm>
-          <a:prstGeom prst="rect">
-            <a:avLst/>
-          </a:prstGeom>
-          <a:solidFill>
-            <a:srgbClr val="F59E0B"/>
-          </a:solidFill>
-          <a:ln>
-            <a:noFill/>
-          </a:ln>
-          <a:effectLst/>
-        </p:spPr>
-        <p:style>
-          <a:lnRef idx="1">
-            <a:schemeClr val="accent1"/>
-          </a:lnRef>
-          <a:fillRef idx="3">
-            <a:schemeClr val="accent1"/>
-          </a:fillRef>
-          <a:effectRef idx="2">
-            <a:schemeClr val="accent1"/>
-          </a:effectRef>
-          <a:fontRef idx="minor">
-            <a:schemeClr val="lt1"/>
-          </a:fontRef>
-        </p:style>
-        <p:txBody>
-          <a:bodyPr rtlCol="0" anchor="ctr"/>
-          <a:lstStyle/>
-          <a:p>
-            <a:pPr algn="ctr"/>
-          </a:p>
-        </p:txBody>
-      </p:sp>
-      <p:sp>
-        <p:nvSpPr>
-          <p:cNvPr id="7" name="TextBox 6"/>
+          <p:cNvPr id="8" name="TextBox 7"/>
           <p:cNvSpPr txBox="1"/>
           <p:nvPr/>
         </p:nvSpPr>
         <p:spPr>
           <a:xfrm>
-            <a:off x="1371600" y="2103120"/>
-            <a:ext cx="1828800" cy="1828800"/>
+            <a:off x="365760" y="6583680"/>
+            <a:ext cx="6400800" cy="274320"/>
           </a:xfrm>
           <a:prstGeom prst="rect">
             <a:avLst/>
@@ -6778,134 +5736,14 @@
           </a:bodyPr>
           <a:lstStyle/>
           <a:p>
-            <a:pPr algn="ctr"/>
-            <a:r>
-              <a:rPr sz="8000" b="0">
-                <a:solidFill>
-                  <a:srgbClr val="F59E0B"/>
+            <a:pPr algn="l"/>
+            <a:r>
+              <a:rPr sz="900" b="0">
+                <a:solidFill>
+                  <a:srgbClr val="FFFFFF"/>
                 </a:solidFill>
                 <a:latin typeface="Calibri"/>
               </a:rPr>
-              <a:t>⚠️</a:t>
-            </a:r>
-          </a:p>
-        </p:txBody>
-      </p:sp>
-      <p:sp>
-        <p:nvSpPr>
-          <p:cNvPr id="8" name="TextBox 7"/>
-          <p:cNvSpPr txBox="1"/>
-          <p:nvPr/>
-        </p:nvSpPr>
-        <p:spPr>
-          <a:xfrm>
-            <a:off x="3474720" y="2103120"/>
-            <a:ext cx="7498079" cy="2743200"/>
-          </a:xfrm>
-          <a:prstGeom prst="rect">
-            <a:avLst/>
-          </a:prstGeom>
-          <a:noFill/>
-        </p:spPr>
-        <p:txBody>
-          <a:bodyPr wrap="square" anchor="ctr" lIns="45720" rIns="45720">
-            <a:spAutoFit/>
-          </a:bodyPr>
-          <a:lstStyle/>
-          <a:p>
-            <a:pPr algn="l"/>
-            <a:r>
-              <a:rPr sz="1800" b="0">
-                <a:solidFill>
-                  <a:srgbClr val="0F2040"/>
-                </a:solidFill>
-                <a:latin typeface="Calibri"/>
-              </a:rPr>
-              <a:t>Para que el escaneo funcione correctamente necesitas:
-📱 Celular con cámara (preferentemente trasera)
-🌐 Conexión a internet (WiFi o datos móviles)
-🔒 Permiso de cámara concedido al navegador
-🌐 Acceder por HTTPS (https://condominios-cyj.vercel.app)
-🔋 Batería suficiente (recomendado &gt;50%)
-🌐 Navegador moderno (Chrome, Safari, Firefox)</a:t>
-            </a:r>
-          </a:p>
-        </p:txBody>
-      </p:sp>
-      <p:sp>
-        <p:nvSpPr>
-          <p:cNvPr id="9" name="Rectangle 8"/>
-          <p:cNvSpPr/>
-          <p:nvPr/>
-        </p:nvSpPr>
-        <p:spPr>
-          <a:xfrm>
-            <a:off x="0" y="6583680"/>
-            <a:ext cx="12191695" cy="274320"/>
-          </a:xfrm>
-          <a:prstGeom prst="rect">
-            <a:avLst/>
-          </a:prstGeom>
-          <a:solidFill>
-            <a:srgbClr val="0F2040"/>
-          </a:solidFill>
-          <a:ln>
-            <a:noFill/>
-          </a:ln>
-          <a:effectLst/>
-        </p:spPr>
-        <p:style>
-          <a:lnRef idx="1">
-            <a:schemeClr val="accent1"/>
-          </a:lnRef>
-          <a:fillRef idx="3">
-            <a:schemeClr val="accent1"/>
-          </a:fillRef>
-          <a:effectRef idx="2">
-            <a:schemeClr val="accent1"/>
-          </a:effectRef>
-          <a:fontRef idx="minor">
-            <a:schemeClr val="lt1"/>
-          </a:fontRef>
-        </p:style>
-        <p:txBody>
-          <a:bodyPr rtlCol="0" anchor="ctr"/>
-          <a:lstStyle/>
-          <a:p>
-            <a:pPr algn="ctr"/>
-          </a:p>
-        </p:txBody>
-      </p:sp>
-      <p:sp>
-        <p:nvSpPr>
-          <p:cNvPr id="10" name="TextBox 9"/>
-          <p:cNvSpPr txBox="1"/>
-          <p:nvPr/>
-        </p:nvSpPr>
-        <p:spPr>
-          <a:xfrm>
-            <a:off x="365760" y="6583680"/>
-            <a:ext cx="6400800" cy="274320"/>
-          </a:xfrm>
-          <a:prstGeom prst="rect">
-            <a:avLst/>
-          </a:prstGeom>
-          <a:noFill/>
-        </p:spPr>
-        <p:txBody>
-          <a:bodyPr wrap="square" anchor="ctr" lIns="45720" rIns="45720">
-            <a:spAutoFit/>
-          </a:bodyPr>
-          <a:lstStyle/>
-          <a:p>
-            <a:pPr algn="l"/>
-            <a:r>
-              <a:rPr sz="900" b="0">
-                <a:solidFill>
-                  <a:srgbClr val="FFFFFF"/>
-                </a:solidFill>
-                <a:latin typeface="Calibri"/>
-              </a:rPr>
               <a:t>Asesorías Integrales CyJ · Capacitación Guardia</a:t>
             </a:r>
           </a:p>
@@ -6913,7 +5751,7 @@
       </p:sp>
       <p:sp>
         <p:nvSpPr>
-          <p:cNvPr id="11" name="TextBox 10"/>
+          <p:cNvPr id="9" name="TextBox 8"/>
           <p:cNvSpPr txBox="1"/>
           <p:nvPr/>
         </p:nvSpPr>
@@ -7046,7 +5884,7 @@
                 </a:solidFill>
                 <a:latin typeface="Calibri"/>
               </a:rPr>
-              <a:t>Solución de problemas</a:t>
+              <a:t>Datos de Acceso</a:t>
             </a:r>
           </a:p>
         </p:txBody>
@@ -7088,20 +5926,208 @@
       </p:sp>
       <p:sp>
         <p:nvSpPr>
-          <p:cNvPr id="5" name="Rounded Rectangle 4"/>
+          <p:cNvPr id="5" name="TextBox 4"/>
+          <p:cNvSpPr txBox="1"/>
+          <p:nvPr/>
+        </p:nvSpPr>
+        <p:spPr>
+          <a:xfrm>
+            <a:off x="457200" y="1005840"/>
+            <a:ext cx="11247120" cy="731520"/>
+          </a:xfrm>
+          <a:prstGeom prst="rect">
+            <a:avLst/>
+          </a:prstGeom>
+          <a:noFill/>
+        </p:spPr>
+        <p:txBody>
+          <a:bodyPr wrap="square" anchor="t" lIns="45720" rIns="45720">
+            <a:spAutoFit/>
+          </a:bodyPr>
+          <a:lstStyle/>
+          <a:p>
+            <a:pPr algn="l"/>
+            <a:r>
+              <a:rPr sz="1400" b="0">
+                <a:solidFill>
+                  <a:srgbClr val="666666"/>
+                </a:solidFill>
+                <a:latin typeface="Calibri"/>
+              </a:rPr>
+              <a:t>Credenciales de prueba:</a:t>
+            </a:r>
+          </a:p>
+        </p:txBody>
+      </p:sp>
+      <p:sp>
+        <p:nvSpPr>
+          <p:cNvPr id="6" name="TextBox 5"/>
+          <p:cNvSpPr txBox="1"/>
+          <p:nvPr/>
+        </p:nvSpPr>
+        <p:spPr>
+          <a:xfrm>
+            <a:off x="640080" y="1828800"/>
+            <a:ext cx="10972800" cy="4572000"/>
+          </a:xfrm>
+          <a:prstGeom prst="rect">
+            <a:avLst/>
+          </a:prstGeom>
+          <a:noFill/>
+        </p:spPr>
+        <p:txBody>
+          <a:bodyPr wrap="square">
+            <a:spAutoFit/>
+          </a:bodyPr>
+          <a:lstStyle/>
+          <a:p>
+            <a:pPr algn="l">
+              <a:lnSpc>
+                <a:spcPct val="140000"/>
+              </a:lnSpc>
+              <a:spcAft>
+                <a:spcPts val="800"/>
+              </a:spcAft>
+            </a:pPr>
+            <a:r>
+              <a:rPr sz="1600" b="1">
+                <a:solidFill>
+                  <a:srgbClr val="F59E0B"/>
+                </a:solidFill>
+              </a:rPr>
+              <a:t>● </a:t>
+            </a:r>
+            <a:r>
+              <a:rPr sz="1600">
+                <a:solidFill>
+                  <a:srgbClr val="0F2040"/>
+                </a:solidFill>
+              </a:rPr>
+              <a:t>URL: https://condominios-cyj.vercel.app</a:t>
+            </a:r>
+          </a:p>
+          <a:p>
+            <a:pPr algn="l">
+              <a:lnSpc>
+                <a:spcPct val="140000"/>
+              </a:lnSpc>
+              <a:spcAft>
+                <a:spcPts val="800"/>
+              </a:spcAft>
+            </a:pPr>
+            <a:r>
+              <a:rPr sz="1600" b="1">
+                <a:solidFill>
+                  <a:srgbClr val="F59E0B"/>
+                </a:solidFill>
+              </a:rPr>
+              <a:t>● </a:t>
+            </a:r>
+            <a:r>
+              <a:rPr sz="1600">
+                <a:solidFill>
+                  <a:srgbClr val="0F2040"/>
+                </a:solidFill>
+              </a:rPr>
+              <a:t>Email: guardia.test@cyj.cl</a:t>
+            </a:r>
+          </a:p>
+          <a:p>
+            <a:pPr algn="l">
+              <a:lnSpc>
+                <a:spcPct val="140000"/>
+              </a:lnSpc>
+              <a:spcAft>
+                <a:spcPts val="800"/>
+              </a:spcAft>
+            </a:pPr>
+            <a:r>
+              <a:rPr sz="1600" b="1">
+                <a:solidFill>
+                  <a:srgbClr val="F59E0B"/>
+                </a:solidFill>
+              </a:rPr>
+              <a:t>● </a:t>
+            </a:r>
+            <a:r>
+              <a:rPr sz="1600">
+                <a:solidFill>
+                  <a:srgbClr val="0F2040"/>
+                </a:solidFill>
+              </a:rPr>
+              <a:t>Contraseña temporal: Guardia2026!</a:t>
+            </a:r>
+          </a:p>
+          <a:p>
+            <a:pPr algn="l">
+              <a:lnSpc>
+                <a:spcPct val="140000"/>
+              </a:lnSpc>
+              <a:spcAft>
+                <a:spcPts val="800"/>
+              </a:spcAft>
+            </a:pPr>
+            <a:r>
+              <a:rPr sz="1600" b="1">
+                <a:solidFill>
+                  <a:srgbClr val="F59E0B"/>
+                </a:solidFill>
+              </a:rPr>
+              <a:t>● </a:t>
+            </a:r>
+            <a:r>
+              <a:rPr sz="1600">
+                <a:solidFill>
+                  <a:srgbClr val="0F2040"/>
+                </a:solidFill>
+              </a:rPr>
+              <a:t>Deberás cambiar la contraseña en el primer login</a:t>
+            </a:r>
+          </a:p>
+          <a:p>
+            <a:pPr algn="l">
+              <a:lnSpc>
+                <a:spcPct val="140000"/>
+              </a:lnSpc>
+              <a:spcAft>
+                <a:spcPts val="800"/>
+              </a:spcAft>
+            </a:pPr>
+            <a:r>
+              <a:rPr sz="1600" b="1">
+                <a:solidFill>
+                  <a:srgbClr val="F59E0B"/>
+                </a:solidFill>
+              </a:rPr>
+              <a:t>● </a:t>
+            </a:r>
+            <a:r>
+              <a:rPr sz="1600">
+                <a:solidFill>
+                  <a:srgbClr val="0F2040"/>
+                </a:solidFill>
+              </a:rPr>
+              <a:t>Página de inicio: /rondas-guardia (automática)</a:t>
+            </a:r>
+          </a:p>
+        </p:txBody>
+      </p:sp>
+      <p:sp>
+        <p:nvSpPr>
+          <p:cNvPr id="7" name="Rectangle 6"/>
           <p:cNvSpPr/>
           <p:nvPr/>
         </p:nvSpPr>
         <p:spPr>
           <a:xfrm>
-            <a:off x="914400" y="1828800"/>
-            <a:ext cx="10332720" cy="3200400"/>
-          </a:xfrm>
-          <a:prstGeom prst="roundRect">
+            <a:off x="0" y="6583680"/>
+            <a:ext cx="12191695" cy="274320"/>
+          </a:xfrm>
+          <a:prstGeom prst="rect">
             <a:avLst/>
           </a:prstGeom>
           <a:solidFill>
-            <a:srgbClr val="F1F5F9"/>
+            <a:srgbClr val="0F2040"/>
           </a:solidFill>
           <a:ln>
             <a:noFill/>
@@ -7132,20 +6158,116 @@
       </p:sp>
       <p:sp>
         <p:nvSpPr>
-          <p:cNvPr id="6" name="Rectangle 5"/>
+          <p:cNvPr id="8" name="TextBox 7"/>
+          <p:cNvSpPr txBox="1"/>
+          <p:nvPr/>
+        </p:nvSpPr>
+        <p:spPr>
+          <a:xfrm>
+            <a:off x="365760" y="6583680"/>
+            <a:ext cx="6400800" cy="274320"/>
+          </a:xfrm>
+          <a:prstGeom prst="rect">
+            <a:avLst/>
+          </a:prstGeom>
+          <a:noFill/>
+        </p:spPr>
+        <p:txBody>
+          <a:bodyPr wrap="square" anchor="ctr" lIns="45720" rIns="45720">
+            <a:spAutoFit/>
+          </a:bodyPr>
+          <a:lstStyle/>
+          <a:p>
+            <a:pPr algn="l"/>
+            <a:r>
+              <a:rPr sz="900" b="0">
+                <a:solidFill>
+                  <a:srgbClr val="FFFFFF"/>
+                </a:solidFill>
+                <a:latin typeface="Calibri"/>
+              </a:rPr>
+              <a:t>Asesorías Integrales CyJ · Capacitación Guardia</a:t>
+            </a:r>
+          </a:p>
+        </p:txBody>
+      </p:sp>
+      <p:sp>
+        <p:nvSpPr>
+          <p:cNvPr id="9" name="TextBox 8"/>
+          <p:cNvSpPr txBox="1"/>
+          <p:nvPr/>
+        </p:nvSpPr>
+        <p:spPr>
+          <a:xfrm>
+            <a:off x="7315200" y="6583680"/>
+            <a:ext cx="4572000" cy="274320"/>
+          </a:xfrm>
+          <a:prstGeom prst="rect">
+            <a:avLst/>
+          </a:prstGeom>
+          <a:noFill/>
+        </p:spPr>
+        <p:txBody>
+          <a:bodyPr wrap="square" anchor="ctr" lIns="45720" rIns="45720">
+            <a:spAutoFit/>
+          </a:bodyPr>
+          <a:lstStyle/>
+          <a:p>
+            <a:pPr algn="r"/>
+            <a:r>
+              <a:rPr sz="900" b="0">
+                <a:solidFill>
+                  <a:srgbClr val="F59E0B"/>
+                </a:solidFill>
+                <a:latin typeface="Calibri"/>
+              </a:rPr>
+              <a:t>https://condominios-cyj.vercel.app</a:t>
+            </a:r>
+          </a:p>
+        </p:txBody>
+      </p:sp>
+    </p:spTree>
+  </p:cSld>
+  <p:clrMapOvr>
+    <a:masterClrMapping/>
+  </p:clrMapOvr>
+</p:sld>
+</file>
+
+<file path=ppt/slides/slide9.xml><?xml version="1.0" encoding="utf-8"?>
+<p:sld xmlns:a="http://schemas.openxmlformats.org/drawingml/2006/main" xmlns:p="http://schemas.openxmlformats.org/presentationml/2006/main" xmlns:r="http://schemas.openxmlformats.org/officeDocument/2006/relationships">
+  <p:cSld>
+    <p:bg>
+      <p:bgPr>
+        <a:solidFill>
+          <a:srgbClr val="0A1172"/>
+        </a:solidFill>
+        <a:effectLst/>
+      </p:bgPr>
+    </p:bg>
+    <p:spTree>
+      <p:nvGrpSpPr>
+        <p:cNvPr id="1" name=""/>
+        <p:cNvGrpSpPr/>
+        <p:nvPr/>
+      </p:nvGrpSpPr>
+      <p:grpSpPr/>
+      <p:sp>
+        <p:nvSpPr>
+          <p:cNvPr id="2" name="Rectangle 1"/>
           <p:cNvSpPr/>
           <p:nvPr/>
         </p:nvSpPr>
         <p:spPr>
           <a:xfrm>
-            <a:off x="914400" y="1828800"/>
-            <a:ext cx="137160" cy="3200400"/>
+            <a:off x="0" y="0"/>
+            <a:ext cx="365760" cy="6858000"/>
           </a:xfrm>
           <a:prstGeom prst="rect">
             <a:avLst/>
           </a:prstGeom>
           <a:solidFill>
-            <a:srgbClr val="0369A1"/>
+            <a:srgbClr val="F59E0B"/>
           </a:solidFill>
           <a:ln>
             <a:noFill/>
@@ -7176,14 +6298,14 @@
       </p:sp>
       <p:sp>
         <p:nvSpPr>
-          <p:cNvPr id="7" name="TextBox 6"/>
+          <p:cNvPr id="3" name="TextBox 2"/>
           <p:cNvSpPr txBox="1"/>
           <p:nvPr/>
         </p:nvSpPr>
         <p:spPr>
           <a:xfrm>
-            <a:off x="1371600" y="2103120"/>
-            <a:ext cx="1828800" cy="1828800"/>
+            <a:off x="731520" y="2286000"/>
+            <a:ext cx="10698480" cy="914400"/>
           </a:xfrm>
           <a:prstGeom prst="rect">
             <a:avLst/>
@@ -7198,27 +6320,27 @@
           <a:p>
             <a:pPr algn="ctr"/>
             <a:r>
-              <a:rPr sz="8000" b="0">
-                <a:solidFill>
-                  <a:srgbClr val="0369A1"/>
+              <a:rPr sz="7200" b="1">
+                <a:solidFill>
+                  <a:srgbClr val="FFFFFF"/>
                 </a:solidFill>
                 <a:latin typeface="Calibri"/>
               </a:rPr>
-              <a:t>ℹ️</a:t>
-            </a:r>
-          </a:p>
-        </p:txBody>
-      </p:sp>
-      <p:sp>
-        <p:nvSpPr>
-          <p:cNvPr id="8" name="TextBox 7"/>
+              <a:t>¡Listo!</a:t>
+            </a:r>
+          </a:p>
+        </p:txBody>
+      </p:sp>
+      <p:sp>
+        <p:nvSpPr>
+          <p:cNvPr id="4" name="TextBox 3"/>
           <p:cNvSpPr txBox="1"/>
           <p:nvPr/>
         </p:nvSpPr>
         <p:spPr>
           <a:xfrm>
-            <a:off x="3474720" y="2103120"/>
-            <a:ext cx="7498079" cy="2743200"/>
+            <a:off x="731520" y="3474720"/>
+            <a:ext cx="10698480" cy="640080"/>
           </a:xfrm>
           <a:prstGeom prst="rect">
             <a:avLst/>
@@ -7226,87 +6348,34 @@
           <a:noFill/>
         </p:spPr>
         <p:txBody>
-          <a:bodyPr wrap="square" anchor="ctr" lIns="45720" rIns="45720">
+          <a:bodyPr wrap="square" anchor="t" lIns="45720" rIns="45720">
             <a:spAutoFit/>
           </a:bodyPr>
           <a:lstStyle/>
           <a:p>
-            <a:pPr algn="l"/>
-            <a:r>
-              <a:rPr sz="1800" b="0">
-                <a:solidFill>
-                  <a:srgbClr val="0F2040"/>
+            <a:pPr algn="ctr"/>
+            <a:r>
+              <a:rPr sz="2200" b="0">
+                <a:solidFill>
+                  <a:srgbClr val="F1F5F9"/>
                 </a:solidFill>
                 <a:latin typeface="Calibri"/>
               </a:rPr>
-              <a:t>Si la cámara no abre:
-1. Verifica que la URL empiece con "https://" (no "http://")
-2. Revisa permisos: ícono candado en barra → Cámara → Permitir
-3. Prueba con botón "Reiniciar"
-4. Si persiste, usa "Ingreso manual" e ingresa el código del QR
-Si el QR no se detecta:
-1. Acerca la cámara a 10-15 cm del QR
-2. Limpia el lente de la cámara
-3. Asegúrate de que el QR no esté dañado
-4. Prueba con mejor iluminación</a:t>
-            </a:r>
-          </a:p>
-        </p:txBody>
-      </p:sp>
-      <p:sp>
-        <p:nvSpPr>
-          <p:cNvPr id="9" name="Rectangle 8"/>
-          <p:cNvSpPr/>
-          <p:nvPr/>
-        </p:nvSpPr>
-        <p:spPr>
-          <a:xfrm>
-            <a:off x="0" y="6583680"/>
-            <a:ext cx="12191695" cy="274320"/>
-          </a:xfrm>
-          <a:prstGeom prst="rect">
-            <a:avLst/>
-          </a:prstGeom>
-          <a:solidFill>
-            <a:srgbClr val="0F2040"/>
-          </a:solidFill>
-          <a:ln>
-            <a:noFill/>
-          </a:ln>
-          <a:effectLst/>
-        </p:spPr>
-        <p:style>
-          <a:lnRef idx="1">
-            <a:schemeClr val="accent1"/>
-          </a:lnRef>
-          <a:fillRef idx="3">
-            <a:schemeClr val="accent1"/>
-          </a:fillRef>
-          <a:effectRef idx="2">
-            <a:schemeClr val="accent1"/>
-          </a:effectRef>
-          <a:fontRef idx="minor">
-            <a:schemeClr val="lt1"/>
-          </a:fontRef>
-        </p:style>
-        <p:txBody>
-          <a:bodyPr rtlCol="0" anchor="ctr"/>
-          <a:lstStyle/>
-          <a:p>
-            <a:pPr algn="ctr"/>
-          </a:p>
-        </p:txBody>
-      </p:sp>
-      <p:sp>
-        <p:nvSpPr>
-          <p:cNvPr id="10" name="TextBox 9"/>
+              <a:t>Ya puedes comenzar a usar el sistema como Guardia</a:t>
+            </a:r>
+          </a:p>
+        </p:txBody>
+      </p:sp>
+      <p:sp>
+        <p:nvSpPr>
+          <p:cNvPr id="5" name="TextBox 4"/>
           <p:cNvSpPr txBox="1"/>
           <p:nvPr/>
         </p:nvSpPr>
         <p:spPr>
           <a:xfrm>
-            <a:off x="365760" y="6583680"/>
-            <a:ext cx="6400800" cy="274320"/>
+            <a:off x="731520" y="4754880"/>
+            <a:ext cx="10698480" cy="457200"/>
           </a:xfrm>
           <a:prstGeom prst="rect">
             <a:avLst/>
@@ -7314,34 +6383,34 @@
           <a:noFill/>
         </p:spPr>
         <p:txBody>
-          <a:bodyPr wrap="square" anchor="ctr" lIns="45720" rIns="45720">
+          <a:bodyPr wrap="square" anchor="t" lIns="45720" rIns="45720">
             <a:spAutoFit/>
           </a:bodyPr>
           <a:lstStyle/>
           <a:p>
-            <a:pPr algn="l"/>
-            <a:r>
-              <a:rPr sz="900" b="0">
-                <a:solidFill>
-                  <a:srgbClr val="FFFFFF"/>
+            <a:pPr algn="ctr"/>
+            <a:r>
+              <a:rPr sz="1400" b="0">
+                <a:solidFill>
+                  <a:srgbClr val="F59E0B"/>
                 </a:solidFill>
                 <a:latin typeface="Calibri"/>
               </a:rPr>
-              <a:t>Asesorías Integrales CyJ · Capacitación Guardia</a:t>
-            </a:r>
-          </a:p>
-        </p:txBody>
-      </p:sp>
-      <p:sp>
-        <p:nvSpPr>
-          <p:cNvPr id="11" name="TextBox 10"/>
+              <a:t>Si tienes dudas, consulta el Manual de Usuario o contacta al administrador</a:t>
+            </a:r>
+          </a:p>
+        </p:txBody>
+      </p:sp>
+      <p:sp>
+        <p:nvSpPr>
+          <p:cNvPr id="6" name="TextBox 5"/>
           <p:cNvSpPr txBox="1"/>
           <p:nvPr/>
         </p:nvSpPr>
         <p:spPr>
           <a:xfrm>
-            <a:off x="7315200" y="6583680"/>
-            <a:ext cx="4572000" cy="274320"/>
+            <a:off x="731520" y="5852160"/>
+            <a:ext cx="10698480" cy="457200"/>
           </a:xfrm>
           <a:prstGeom prst="rect">
             <a:avLst/>
@@ -7349,440 +6418,20 @@
           <a:noFill/>
         </p:spPr>
         <p:txBody>
-          <a:bodyPr wrap="square" anchor="ctr" lIns="45720" rIns="45720">
+          <a:bodyPr wrap="square" anchor="t" lIns="45720" rIns="45720">
             <a:spAutoFit/>
           </a:bodyPr>
           <a:lstStyle/>
           <a:p>
-            <a:pPr algn="r"/>
-            <a:r>
-              <a:rPr sz="900" b="0">
-                <a:solidFill>
-                  <a:srgbClr val="F59E0B"/>
+            <a:pPr algn="ctr"/>
+            <a:r>
+              <a:rPr sz="1400" b="1">
+                <a:solidFill>
+                  <a:srgbClr val="FFFFFF"/>
                 </a:solidFill>
                 <a:latin typeface="Calibri"/>
               </a:rPr>
-              <a:t>https://condominios-cyj.vercel.app</a:t>
-            </a:r>
-          </a:p>
-        </p:txBody>
-      </p:sp>
-    </p:spTree>
-  </p:cSld>
-  <p:clrMapOvr>
-    <a:masterClrMapping/>
-  </p:clrMapOvr>
-</p:sld>
-</file>
-
-<file path=ppt/slides/slide9.xml><?xml version="1.0" encoding="utf-8"?>
-<p:sld xmlns:a="http://schemas.openxmlformats.org/drawingml/2006/main" xmlns:p="http://schemas.openxmlformats.org/presentationml/2006/main" xmlns:r="http://schemas.openxmlformats.org/officeDocument/2006/relationships">
-  <p:cSld>
-    <p:bg>
-      <p:bgPr>
-        <a:solidFill>
-          <a:srgbClr val="FFFFFF"/>
-        </a:solidFill>
-        <a:effectLst/>
-      </p:bgPr>
-    </p:bg>
-    <p:spTree>
-      <p:nvGrpSpPr>
-        <p:cNvPr id="1" name=""/>
-        <p:cNvGrpSpPr/>
-        <p:nvPr/>
-      </p:nvGrpSpPr>
-      <p:grpSpPr/>
-      <p:sp>
-        <p:nvSpPr>
-          <p:cNvPr id="2" name="Rectangle 1"/>
-          <p:cNvSpPr/>
-          <p:nvPr/>
-        </p:nvSpPr>
-        <p:spPr>
-          <a:xfrm>
-            <a:off x="0" y="0"/>
-            <a:ext cx="12191695" cy="822960"/>
-          </a:xfrm>
-          <a:prstGeom prst="rect">
-            <a:avLst/>
-          </a:prstGeom>
-          <a:solidFill>
-            <a:srgbClr val="0A1172"/>
-          </a:solidFill>
-          <a:ln>
-            <a:noFill/>
-          </a:ln>
-          <a:effectLst/>
-        </p:spPr>
-        <p:style>
-          <a:lnRef idx="1">
-            <a:schemeClr val="accent1"/>
-          </a:lnRef>
-          <a:fillRef idx="3">
-            <a:schemeClr val="accent1"/>
-          </a:fillRef>
-          <a:effectRef idx="2">
-            <a:schemeClr val="accent1"/>
-          </a:effectRef>
-          <a:fontRef idx="minor">
-            <a:schemeClr val="lt1"/>
-          </a:fontRef>
-        </p:style>
-        <p:txBody>
-          <a:bodyPr rtlCol="0" anchor="ctr"/>
-          <a:lstStyle/>
-          <a:p>
-            <a:pPr algn="ctr"/>
-          </a:p>
-        </p:txBody>
-      </p:sp>
-      <p:sp>
-        <p:nvSpPr>
-          <p:cNvPr id="3" name="TextBox 2"/>
-          <p:cNvSpPr txBox="1"/>
-          <p:nvPr/>
-        </p:nvSpPr>
-        <p:spPr>
-          <a:xfrm>
-            <a:off x="365760" y="137160"/>
-            <a:ext cx="10058400" cy="548640"/>
-          </a:xfrm>
-          <a:prstGeom prst="rect">
-            <a:avLst/>
-          </a:prstGeom>
-          <a:noFill/>
-        </p:spPr>
-        <p:txBody>
-          <a:bodyPr wrap="square" anchor="ctr" lIns="45720" rIns="45720">
-            <a:spAutoFit/>
-          </a:bodyPr>
-          <a:lstStyle/>
-          <a:p>
-            <a:pPr algn="l"/>
-            <a:r>
-              <a:rPr sz="2200" b="1">
-                <a:solidFill>
-                  <a:srgbClr val="FFFFFF"/>
-                </a:solidFill>
-                <a:latin typeface="Calibri"/>
-              </a:rPr>
-              <a:t>No puedes hacer</a:t>
-            </a:r>
-          </a:p>
-        </p:txBody>
-      </p:sp>
-      <p:sp>
-        <p:nvSpPr>
-          <p:cNvPr id="4" name="TextBox 3"/>
-          <p:cNvSpPr txBox="1"/>
-          <p:nvPr/>
-        </p:nvSpPr>
-        <p:spPr>
-          <a:xfrm>
-            <a:off x="11247120" y="137160"/>
-            <a:ext cx="731520" cy="548640"/>
-          </a:xfrm>
-          <a:prstGeom prst="rect">
-            <a:avLst/>
-          </a:prstGeom>
-          <a:noFill/>
-        </p:spPr>
-        <p:txBody>
-          <a:bodyPr wrap="square" anchor="ctr" lIns="45720" rIns="45720">
-            <a:spAutoFit/>
-          </a:bodyPr>
-          <a:lstStyle/>
-          <a:p>
-            <a:pPr algn="r"/>
-            <a:r>
-              <a:rPr sz="1400" b="0">
-                <a:solidFill>
-                  <a:srgbClr val="F59E0B"/>
-                </a:solidFill>
-                <a:latin typeface="Calibri"/>
-              </a:rPr>
-              <a:t>9</a:t>
-            </a:r>
-          </a:p>
-        </p:txBody>
-      </p:sp>
-      <p:sp>
-        <p:nvSpPr>
-          <p:cNvPr id="5" name="Rounded Rectangle 4"/>
-          <p:cNvSpPr/>
-          <p:nvPr/>
-        </p:nvSpPr>
-        <p:spPr>
-          <a:xfrm>
-            <a:off x="914400" y="1828800"/>
-            <a:ext cx="10332720" cy="3200400"/>
-          </a:xfrm>
-          <a:prstGeom prst="roundRect">
-            <a:avLst/>
-          </a:prstGeom>
-          <a:solidFill>
-            <a:srgbClr val="F1F5F9"/>
-          </a:solidFill>
-          <a:ln>
-            <a:noFill/>
-          </a:ln>
-          <a:effectLst/>
-        </p:spPr>
-        <p:style>
-          <a:lnRef idx="1">
-            <a:schemeClr val="accent1"/>
-          </a:lnRef>
-          <a:fillRef idx="3">
-            <a:schemeClr val="accent1"/>
-          </a:fillRef>
-          <a:effectRef idx="2">
-            <a:schemeClr val="accent1"/>
-          </a:effectRef>
-          <a:fontRef idx="minor">
-            <a:schemeClr val="lt1"/>
-          </a:fontRef>
-        </p:style>
-        <p:txBody>
-          <a:bodyPr rtlCol="0" anchor="ctr"/>
-          <a:lstStyle/>
-          <a:p>
-            <a:pPr algn="ctr"/>
-          </a:p>
-        </p:txBody>
-      </p:sp>
-      <p:sp>
-        <p:nvSpPr>
-          <p:cNvPr id="6" name="Rectangle 5"/>
-          <p:cNvSpPr/>
-          <p:nvPr/>
-        </p:nvSpPr>
-        <p:spPr>
-          <a:xfrm>
-            <a:off x="914400" y="1828800"/>
-            <a:ext cx="137160" cy="3200400"/>
-          </a:xfrm>
-          <a:prstGeom prst="rect">
-            <a:avLst/>
-          </a:prstGeom>
-          <a:solidFill>
-            <a:srgbClr val="DC2626"/>
-          </a:solidFill>
-          <a:ln>
-            <a:noFill/>
-          </a:ln>
-          <a:effectLst/>
-        </p:spPr>
-        <p:style>
-          <a:lnRef idx="1">
-            <a:schemeClr val="accent1"/>
-          </a:lnRef>
-          <a:fillRef idx="3">
-            <a:schemeClr val="accent1"/>
-          </a:fillRef>
-          <a:effectRef idx="2">
-            <a:schemeClr val="accent1"/>
-          </a:effectRef>
-          <a:fontRef idx="minor">
-            <a:schemeClr val="lt1"/>
-          </a:fontRef>
-        </p:style>
-        <p:txBody>
-          <a:bodyPr rtlCol="0" anchor="ctr"/>
-          <a:lstStyle/>
-          <a:p>
-            <a:pPr algn="ctr"/>
-          </a:p>
-        </p:txBody>
-      </p:sp>
-      <p:sp>
-        <p:nvSpPr>
-          <p:cNvPr id="7" name="TextBox 6"/>
-          <p:cNvSpPr txBox="1"/>
-          <p:nvPr/>
-        </p:nvSpPr>
-        <p:spPr>
-          <a:xfrm>
-            <a:off x="1371600" y="2103120"/>
-            <a:ext cx="1828800" cy="1828800"/>
-          </a:xfrm>
-          <a:prstGeom prst="rect">
-            <a:avLst/>
-          </a:prstGeom>
-          <a:noFill/>
-        </p:spPr>
-        <p:txBody>
-          <a:bodyPr wrap="square" anchor="ctr" lIns="45720" rIns="45720">
-            <a:spAutoFit/>
-          </a:bodyPr>
-          <a:lstStyle/>
-          <a:p>
-            <a:pPr algn="ctr"/>
-            <a:r>
-              <a:rPr sz="8000" b="0">
-                <a:solidFill>
-                  <a:srgbClr val="DC2626"/>
-                </a:solidFill>
-                <a:latin typeface="Calibri"/>
-              </a:rPr>
-              <a:t>⛔</a:t>
-            </a:r>
-          </a:p>
-        </p:txBody>
-      </p:sp>
-      <p:sp>
-        <p:nvSpPr>
-          <p:cNvPr id="8" name="TextBox 7"/>
-          <p:cNvSpPr txBox="1"/>
-          <p:nvPr/>
-        </p:nvSpPr>
-        <p:spPr>
-          <a:xfrm>
-            <a:off x="3474720" y="2103120"/>
-            <a:ext cx="7498079" cy="2743200"/>
-          </a:xfrm>
-          <a:prstGeom prst="rect">
-            <a:avLst/>
-          </a:prstGeom>
-          <a:noFill/>
-        </p:spPr>
-        <p:txBody>
-          <a:bodyPr wrap="square" anchor="ctr" lIns="45720" rIns="45720">
-            <a:spAutoFit/>
-          </a:bodyPr>
-          <a:lstStyle/>
-          <a:p>
-            <a:pPr algn="l"/>
-            <a:r>
-              <a:rPr sz="1800" b="0">
-                <a:solidFill>
-                  <a:srgbClr val="0F2040"/>
-                </a:solidFill>
-                <a:latin typeface="Calibri"/>
-              </a:rPr>
-              <a:t>El rol Guardia es el más restringido del sistema:
-✗ Ver el Dashboard o cualquier otro módulo
-✗ Ver Órdenes de Trabajo, Proyectos, Personal
-✗ Ver Solicitudes de Compra
-✗ Ver Usuarios, Permisos, Auditoría
-✗ Crear, editar o eliminar rondas
-✗ Ver QR de las rondas (eso lo hace el admin)
-✗ Descargar PDF con QR
-Tu única función es REGISTRAR RONDAS escaneando QR.</a:t>
-            </a:r>
-          </a:p>
-        </p:txBody>
-      </p:sp>
-      <p:sp>
-        <p:nvSpPr>
-          <p:cNvPr id="9" name="Rectangle 8"/>
-          <p:cNvSpPr/>
-          <p:nvPr/>
-        </p:nvSpPr>
-        <p:spPr>
-          <a:xfrm>
-            <a:off x="0" y="6583680"/>
-            <a:ext cx="12191695" cy="274320"/>
-          </a:xfrm>
-          <a:prstGeom prst="rect">
-            <a:avLst/>
-          </a:prstGeom>
-          <a:solidFill>
-            <a:srgbClr val="0F2040"/>
-          </a:solidFill>
-          <a:ln>
-            <a:noFill/>
-          </a:ln>
-          <a:effectLst/>
-        </p:spPr>
-        <p:style>
-          <a:lnRef idx="1">
-            <a:schemeClr val="accent1"/>
-          </a:lnRef>
-          <a:fillRef idx="3">
-            <a:schemeClr val="accent1"/>
-          </a:fillRef>
-          <a:effectRef idx="2">
-            <a:schemeClr val="accent1"/>
-          </a:effectRef>
-          <a:fontRef idx="minor">
-            <a:schemeClr val="lt1"/>
-          </a:fontRef>
-        </p:style>
-        <p:txBody>
-          <a:bodyPr rtlCol="0" anchor="ctr"/>
-          <a:lstStyle/>
-          <a:p>
-            <a:pPr algn="ctr"/>
-          </a:p>
-        </p:txBody>
-      </p:sp>
-      <p:sp>
-        <p:nvSpPr>
-          <p:cNvPr id="10" name="TextBox 9"/>
-          <p:cNvSpPr txBox="1"/>
-          <p:nvPr/>
-        </p:nvSpPr>
-        <p:spPr>
-          <a:xfrm>
-            <a:off x="365760" y="6583680"/>
-            <a:ext cx="6400800" cy="274320"/>
-          </a:xfrm>
-          <a:prstGeom prst="rect">
-            <a:avLst/>
-          </a:prstGeom>
-          <a:noFill/>
-        </p:spPr>
-        <p:txBody>
-          <a:bodyPr wrap="square" anchor="ctr" lIns="45720" rIns="45720">
-            <a:spAutoFit/>
-          </a:bodyPr>
-          <a:lstStyle/>
-          <a:p>
-            <a:pPr algn="l"/>
-            <a:r>
-              <a:rPr sz="900" b="0">
-                <a:solidFill>
-                  <a:srgbClr val="FFFFFF"/>
-                </a:solidFill>
-                <a:latin typeface="Calibri"/>
-              </a:rPr>
-              <a:t>Asesorías Integrales CyJ · Capacitación Guardia</a:t>
-            </a:r>
-          </a:p>
-        </p:txBody>
-      </p:sp>
-      <p:sp>
-        <p:nvSpPr>
-          <p:cNvPr id="11" name="TextBox 10"/>
-          <p:cNvSpPr txBox="1"/>
-          <p:nvPr/>
-        </p:nvSpPr>
-        <p:spPr>
-          <a:xfrm>
-            <a:off x="7315200" y="6583680"/>
-            <a:ext cx="4572000" cy="274320"/>
-          </a:xfrm>
-          <a:prstGeom prst="rect">
-            <a:avLst/>
-          </a:prstGeom>
-          <a:noFill/>
-        </p:spPr>
-        <p:txBody>
-          <a:bodyPr wrap="square" anchor="ctr" lIns="45720" rIns="45720">
-            <a:spAutoFit/>
-          </a:bodyPr>
-          <a:lstStyle/>
-          <a:p>
-            <a:pPr algn="r"/>
-            <a:r>
-              <a:rPr sz="900" b="0">
-                <a:solidFill>
-                  <a:srgbClr val="F59E0B"/>
-                </a:solidFill>
-                <a:latin typeface="Calibri"/>
-              </a:rPr>
-              <a:t>https://condominios-cyj.vercel.app</a:t>
+              <a:t>asesoriasintegralescyj@gmail.com  ·  +56 964 650 643</a:t>
             </a:r>
           </a:p>
         </p:txBody>
